--- a/Pregrado/Trabajo de grado 2/Clases/Sesion 04 - Antecedentes y referentes (Fase I)/Presentacion.pptx
+++ b/Pregrado/Trabajo de grado 2/Clases/Sesion 04 - Antecedentes y referentes (Fase I)/Presentacion.pptx
@@ -3364,41 +3364,6 @@
           </a:p>
         </p:txBody>
       </p:sp>
-      <p:sp>
-        <p:nvSpPr>
-          <p:cNvPr id="7" name="TextBox 6"/>
-          <p:cNvSpPr txBox="1"/>
-          <p:nvPr/>
-        </p:nvSpPr>
-        <p:spPr>
-          <a:xfrm>
-            <a:off x="2194560" y="6446520"/>
-            <a:ext cx="5943600" cy="274320"/>
-          </a:xfrm>
-          <a:prstGeom prst="rect">
-            <a:avLst/>
-          </a:prstGeom>
-          <a:noFill/>
-        </p:spPr>
-        <p:txBody>
-          <a:bodyPr wrap="square" anchor="t" lIns="0" rIns="0" tIns="0" bIns="0">
-            <a:spAutoFit/>
-          </a:bodyPr>
-          <a:lstStyle/>
-          <a:p>
-            <a:pPr algn="l"/>
-            <a:r>
-              <a:rPr sz="1000" b="1" i="0">
-                <a:solidFill>
-                  <a:srgbClr val="8F989D"/>
-                </a:solidFill>
-                <a:latin typeface="Calibri"/>
-              </a:rPr>
-              <a:t>Inicio 5:10 pm</a:t>
-            </a:r>
-          </a:p>
-        </p:txBody>
-      </p:sp>
     </p:spTree>
   </p:cSld>
   <p:clrMapOvr>
@@ -3818,41 +3783,6 @@
         </p:nvSpPr>
         <p:spPr>
           <a:xfrm>
-            <a:off x="2194560" y="6446520"/>
-            <a:ext cx="5943600" cy="274320"/>
-          </a:xfrm>
-          <a:prstGeom prst="rect">
-            <a:avLst/>
-          </a:prstGeom>
-          <a:noFill/>
-        </p:spPr>
-        <p:txBody>
-          <a:bodyPr wrap="square" anchor="t" lIns="0" rIns="0" tIns="0" bIns="0">
-            <a:spAutoFit/>
-          </a:bodyPr>
-          <a:lstStyle/>
-          <a:p>
-            <a:pPr algn="l"/>
-            <a:r>
-              <a:rPr sz="1000" b="1" i="0">
-                <a:solidFill>
-                  <a:srgbClr val="8F989D"/>
-                </a:solidFill>
-                <a:latin typeface="Calibri"/>
-              </a:rPr>
-              <a:t>Inicio 5:10 pm</a:t>
-            </a:r>
-          </a:p>
-        </p:txBody>
-      </p:sp>
-      <p:sp>
-        <p:nvSpPr>
-          <p:cNvPr id="6" name="TextBox 5"/>
-          <p:cNvSpPr txBox="1"/>
-          <p:nvPr/>
-        </p:nvSpPr>
-        <p:spPr>
-          <a:xfrm>
             <a:off x="11094415" y="6446520"/>
             <a:ext cx="548640" cy="274320"/>
           </a:xfrm>
@@ -4302,41 +4232,6 @@
         </p:nvSpPr>
         <p:spPr>
           <a:xfrm>
-            <a:off x="2194560" y="6446520"/>
-            <a:ext cx="5943600" cy="274320"/>
-          </a:xfrm>
-          <a:prstGeom prst="rect">
-            <a:avLst/>
-          </a:prstGeom>
-          <a:noFill/>
-        </p:spPr>
-        <p:txBody>
-          <a:bodyPr wrap="square" anchor="t" lIns="0" rIns="0" tIns="0" bIns="0">
-            <a:spAutoFit/>
-          </a:bodyPr>
-          <a:lstStyle/>
-          <a:p>
-            <a:pPr algn="l"/>
-            <a:r>
-              <a:rPr sz="1000" b="1" i="0">
-                <a:solidFill>
-                  <a:srgbClr val="8F989D"/>
-                </a:solidFill>
-                <a:latin typeface="Calibri"/>
-              </a:rPr>
-              <a:t>Inicio 5:10 pm</a:t>
-            </a:r>
-          </a:p>
-        </p:txBody>
-      </p:sp>
-      <p:sp>
-        <p:nvSpPr>
-          <p:cNvPr id="11" name="TextBox 10"/>
-          <p:cNvSpPr txBox="1"/>
-          <p:nvPr/>
-        </p:nvSpPr>
-        <p:spPr>
-          <a:xfrm>
             <a:off x="11094415" y="6446520"/>
             <a:ext cx="548640" cy="274320"/>
           </a:xfrm>
@@ -4580,41 +4475,6 @@
         </p:nvSpPr>
         <p:spPr>
           <a:xfrm>
-            <a:off x="2194560" y="6446520"/>
-            <a:ext cx="5943600" cy="274320"/>
-          </a:xfrm>
-          <a:prstGeom prst="rect">
-            <a:avLst/>
-          </a:prstGeom>
-          <a:noFill/>
-        </p:spPr>
-        <p:txBody>
-          <a:bodyPr wrap="square" anchor="t" lIns="0" rIns="0" tIns="0" bIns="0">
-            <a:spAutoFit/>
-          </a:bodyPr>
-          <a:lstStyle/>
-          <a:p>
-            <a:pPr algn="l"/>
-            <a:r>
-              <a:rPr sz="1000" b="1" i="0">
-                <a:solidFill>
-                  <a:srgbClr val="8F989D"/>
-                </a:solidFill>
-                <a:latin typeface="Calibri"/>
-              </a:rPr>
-              <a:t>Inicio 5:10 pm</a:t>
-            </a:r>
-          </a:p>
-        </p:txBody>
-      </p:sp>
-      <p:sp>
-        <p:nvSpPr>
-          <p:cNvPr id="7" name="TextBox 6"/>
-          <p:cNvSpPr txBox="1"/>
-          <p:nvPr/>
-        </p:nvSpPr>
-        <p:spPr>
-          <a:xfrm>
             <a:off x="11094415" y="6446520"/>
             <a:ext cx="548640" cy="274320"/>
           </a:xfrm>
@@ -5158,41 +5018,6 @@
         </p:nvSpPr>
         <p:spPr>
           <a:xfrm>
-            <a:off x="2194560" y="6446520"/>
-            <a:ext cx="5943600" cy="274320"/>
-          </a:xfrm>
-          <a:prstGeom prst="rect">
-            <a:avLst/>
-          </a:prstGeom>
-          <a:noFill/>
-        </p:spPr>
-        <p:txBody>
-          <a:bodyPr wrap="square" anchor="t" lIns="0" rIns="0" tIns="0" bIns="0">
-            <a:spAutoFit/>
-          </a:bodyPr>
-          <a:lstStyle/>
-          <a:p>
-            <a:pPr algn="l"/>
-            <a:r>
-              <a:rPr sz="1000" b="1" i="0">
-                <a:solidFill>
-                  <a:srgbClr val="8F989D"/>
-                </a:solidFill>
-                <a:latin typeface="Calibri"/>
-              </a:rPr>
-              <a:t>Inicio 5:10 pm</a:t>
-            </a:r>
-          </a:p>
-        </p:txBody>
-      </p:sp>
-      <p:sp>
-        <p:nvSpPr>
-          <p:cNvPr id="6" name="TextBox 5"/>
-          <p:cNvSpPr txBox="1"/>
-          <p:nvPr/>
-        </p:nvSpPr>
-        <p:spPr>
-          <a:xfrm>
             <a:off x="11094415" y="6446520"/>
             <a:ext cx="548640" cy="274320"/>
           </a:xfrm>
@@ -5222,7 +5047,7 @@
       </p:sp>
       <p:sp>
         <p:nvSpPr>
-          <p:cNvPr id="7" name="TextBox 6"/>
+          <p:cNvPr id="6" name="TextBox 5"/>
           <p:cNvSpPr txBox="1"/>
           <p:nvPr/>
         </p:nvSpPr>
@@ -5752,41 +5577,6 @@
         </p:nvSpPr>
         <p:spPr>
           <a:xfrm>
-            <a:off x="2194560" y="6446520"/>
-            <a:ext cx="5943600" cy="274320"/>
-          </a:xfrm>
-          <a:prstGeom prst="rect">
-            <a:avLst/>
-          </a:prstGeom>
-          <a:noFill/>
-        </p:spPr>
-        <p:txBody>
-          <a:bodyPr wrap="square" anchor="t" lIns="0" rIns="0" tIns="0" bIns="0">
-            <a:spAutoFit/>
-          </a:bodyPr>
-          <a:lstStyle/>
-          <a:p>
-            <a:pPr algn="l"/>
-            <a:r>
-              <a:rPr sz="1000" b="1" i="0">
-                <a:solidFill>
-                  <a:srgbClr val="8F989D"/>
-                </a:solidFill>
-                <a:latin typeface="Calibri"/>
-              </a:rPr>
-              <a:t>Inicio 5:10 pm</a:t>
-            </a:r>
-          </a:p>
-        </p:txBody>
-      </p:sp>
-      <p:sp>
-        <p:nvSpPr>
-          <p:cNvPr id="6" name="TextBox 5"/>
-          <p:cNvSpPr txBox="1"/>
-          <p:nvPr/>
-        </p:nvSpPr>
-        <p:spPr>
-          <a:xfrm>
             <a:off x="11094415" y="6446520"/>
             <a:ext cx="548640" cy="274320"/>
           </a:xfrm>
@@ -6078,41 +5868,6 @@
         </p:nvSpPr>
         <p:spPr>
           <a:xfrm>
-            <a:off x="2194560" y="6446520"/>
-            <a:ext cx="5943600" cy="274320"/>
-          </a:xfrm>
-          <a:prstGeom prst="rect">
-            <a:avLst/>
-          </a:prstGeom>
-          <a:noFill/>
-        </p:spPr>
-        <p:txBody>
-          <a:bodyPr wrap="square" anchor="t" lIns="0" rIns="0" tIns="0" bIns="0">
-            <a:spAutoFit/>
-          </a:bodyPr>
-          <a:lstStyle/>
-          <a:p>
-            <a:pPr algn="l"/>
-            <a:r>
-              <a:rPr sz="1000" b="1" i="0">
-                <a:solidFill>
-                  <a:srgbClr val="8F989D"/>
-                </a:solidFill>
-                <a:latin typeface="Calibri"/>
-              </a:rPr>
-              <a:t>Inicio 5:10 pm</a:t>
-            </a:r>
-          </a:p>
-        </p:txBody>
-      </p:sp>
-      <p:sp>
-        <p:nvSpPr>
-          <p:cNvPr id="6" name="TextBox 5"/>
-          <p:cNvSpPr txBox="1"/>
-          <p:nvPr/>
-        </p:nvSpPr>
-        <p:spPr>
-          <a:xfrm>
             <a:off x="11094415" y="6446520"/>
             <a:ext cx="548640" cy="274320"/>
           </a:xfrm>
@@ -6514,41 +6269,6 @@
         </p:nvSpPr>
         <p:spPr>
           <a:xfrm>
-            <a:off x="2194560" y="6446520"/>
-            <a:ext cx="5943600" cy="274320"/>
-          </a:xfrm>
-          <a:prstGeom prst="rect">
-            <a:avLst/>
-          </a:prstGeom>
-          <a:noFill/>
-        </p:spPr>
-        <p:txBody>
-          <a:bodyPr wrap="square" anchor="t" lIns="0" rIns="0" tIns="0" bIns="0">
-            <a:spAutoFit/>
-          </a:bodyPr>
-          <a:lstStyle/>
-          <a:p>
-            <a:pPr algn="l"/>
-            <a:r>
-              <a:rPr sz="1000" b="1" i="0">
-                <a:solidFill>
-                  <a:srgbClr val="8F989D"/>
-                </a:solidFill>
-                <a:latin typeface="Calibri"/>
-              </a:rPr>
-              <a:t>Inicio 5:10 pm</a:t>
-            </a:r>
-          </a:p>
-        </p:txBody>
-      </p:sp>
-      <p:sp>
-        <p:nvSpPr>
-          <p:cNvPr id="6" name="TextBox 5"/>
-          <p:cNvSpPr txBox="1"/>
-          <p:nvPr/>
-        </p:nvSpPr>
-        <p:spPr>
-          <a:xfrm>
             <a:off x="11094415" y="6446520"/>
             <a:ext cx="548640" cy="274320"/>
           </a:xfrm>
@@ -6795,41 +6515,6 @@
           </a:p>
         </p:txBody>
       </p:sp>
-      <p:sp>
-        <p:nvSpPr>
-          <p:cNvPr id="7" name="TextBox 6"/>
-          <p:cNvSpPr txBox="1"/>
-          <p:nvPr/>
-        </p:nvSpPr>
-        <p:spPr>
-          <a:xfrm>
-            <a:off x="2194560" y="6446520"/>
-            <a:ext cx="5943600" cy="274320"/>
-          </a:xfrm>
-          <a:prstGeom prst="rect">
-            <a:avLst/>
-          </a:prstGeom>
-          <a:noFill/>
-        </p:spPr>
-        <p:txBody>
-          <a:bodyPr wrap="square" anchor="t" lIns="0" rIns="0" tIns="0" bIns="0">
-            <a:spAutoFit/>
-          </a:bodyPr>
-          <a:lstStyle/>
-          <a:p>
-            <a:pPr algn="l"/>
-            <a:r>
-              <a:rPr sz="1000" b="1" i="0">
-                <a:solidFill>
-                  <a:srgbClr val="8F989D"/>
-                </a:solidFill>
-                <a:latin typeface="Calibri"/>
-              </a:rPr>
-              <a:t>Inicio 5:10 pm</a:t>
-            </a:r>
-          </a:p>
-        </p:txBody>
-      </p:sp>
     </p:spTree>
   </p:cSld>
   <p:clrMapOvr>
@@ -7197,41 +6882,6 @@
       <p:sp>
         <p:nvSpPr>
           <p:cNvPr id="5" name="TextBox 4"/>
-          <p:cNvSpPr txBox="1"/>
-          <p:nvPr/>
-        </p:nvSpPr>
-        <p:spPr>
-          <a:xfrm>
-            <a:off x="2194560" y="6446520"/>
-            <a:ext cx="5943600" cy="274320"/>
-          </a:xfrm>
-          <a:prstGeom prst="rect">
-            <a:avLst/>
-          </a:prstGeom>
-          <a:noFill/>
-        </p:spPr>
-        <p:txBody>
-          <a:bodyPr wrap="square" anchor="t" lIns="0" rIns="0" tIns="0" bIns="0">
-            <a:spAutoFit/>
-          </a:bodyPr>
-          <a:lstStyle/>
-          <a:p>
-            <a:pPr algn="l"/>
-            <a:r>
-              <a:rPr sz="1000" b="1" i="0">
-                <a:solidFill>
-                  <a:srgbClr val="8F989D"/>
-                </a:solidFill>
-                <a:latin typeface="Calibri"/>
-              </a:rPr>
-              <a:t>Inicio 5:10 pm</a:t>
-            </a:r>
-          </a:p>
-        </p:txBody>
-      </p:sp>
-      <p:sp>
-        <p:nvSpPr>
-          <p:cNvPr id="6" name="TextBox 5"/>
           <p:cNvSpPr txBox="1"/>
           <p:nvPr/>
         </p:nvSpPr>
@@ -7909,41 +7559,6 @@
         </p:nvSpPr>
         <p:spPr>
           <a:xfrm>
-            <a:off x="2194560" y="6446520"/>
-            <a:ext cx="5943600" cy="274320"/>
-          </a:xfrm>
-          <a:prstGeom prst="rect">
-            <a:avLst/>
-          </a:prstGeom>
-          <a:noFill/>
-        </p:spPr>
-        <p:txBody>
-          <a:bodyPr wrap="square" anchor="t" lIns="0" rIns="0" tIns="0" bIns="0">
-            <a:spAutoFit/>
-          </a:bodyPr>
-          <a:lstStyle/>
-          <a:p>
-            <a:pPr algn="l"/>
-            <a:r>
-              <a:rPr sz="1000" b="1" i="0">
-                <a:solidFill>
-                  <a:srgbClr val="8F989D"/>
-                </a:solidFill>
-                <a:latin typeface="Calibri"/>
-              </a:rPr>
-              <a:t>Inicio 5:10 pm</a:t>
-            </a:r>
-          </a:p>
-        </p:txBody>
-      </p:sp>
-      <p:sp>
-        <p:nvSpPr>
-          <p:cNvPr id="7" name="TextBox 6"/>
-          <p:cNvSpPr txBox="1"/>
-          <p:nvPr/>
-        </p:nvSpPr>
-        <p:spPr>
-          <a:xfrm>
             <a:off x="11094415" y="6446520"/>
             <a:ext cx="548640" cy="274320"/>
           </a:xfrm>
@@ -8338,41 +7953,6 @@
       <p:sp>
         <p:nvSpPr>
           <p:cNvPr id="5" name="TextBox 4"/>
-          <p:cNvSpPr txBox="1"/>
-          <p:nvPr/>
-        </p:nvSpPr>
-        <p:spPr>
-          <a:xfrm>
-            <a:off x="2194560" y="6446520"/>
-            <a:ext cx="5943600" cy="274320"/>
-          </a:xfrm>
-          <a:prstGeom prst="rect">
-            <a:avLst/>
-          </a:prstGeom>
-          <a:noFill/>
-        </p:spPr>
-        <p:txBody>
-          <a:bodyPr wrap="square" anchor="t" lIns="0" rIns="0" tIns="0" bIns="0">
-            <a:spAutoFit/>
-          </a:bodyPr>
-          <a:lstStyle/>
-          <a:p>
-            <a:pPr algn="l"/>
-            <a:r>
-              <a:rPr sz="1000" b="1" i="0">
-                <a:solidFill>
-                  <a:srgbClr val="8F989D"/>
-                </a:solidFill>
-                <a:latin typeface="Calibri"/>
-              </a:rPr>
-              <a:t>Inicio 5:10 pm</a:t>
-            </a:r>
-          </a:p>
-        </p:txBody>
-      </p:sp>
-      <p:sp>
-        <p:nvSpPr>
-          <p:cNvPr id="6" name="TextBox 5"/>
           <p:cNvSpPr txBox="1"/>
           <p:nvPr/>
         </p:nvSpPr>
@@ -9005,41 +8585,6 @@
         </p:nvSpPr>
         <p:spPr>
           <a:xfrm>
-            <a:off x="2194560" y="6446520"/>
-            <a:ext cx="5943600" cy="274320"/>
-          </a:xfrm>
-          <a:prstGeom prst="rect">
-            <a:avLst/>
-          </a:prstGeom>
-          <a:noFill/>
-        </p:spPr>
-        <p:txBody>
-          <a:bodyPr wrap="square" anchor="t" lIns="0" rIns="0" tIns="0" bIns="0">
-            <a:spAutoFit/>
-          </a:bodyPr>
-          <a:lstStyle/>
-          <a:p>
-            <a:pPr algn="l"/>
-            <a:r>
-              <a:rPr sz="1000" b="1" i="0">
-                <a:solidFill>
-                  <a:srgbClr val="8F989D"/>
-                </a:solidFill>
-                <a:latin typeface="Calibri"/>
-              </a:rPr>
-              <a:t>Inicio 5:10 pm</a:t>
-            </a:r>
-          </a:p>
-        </p:txBody>
-      </p:sp>
-      <p:sp>
-        <p:nvSpPr>
-          <p:cNvPr id="7" name="TextBox 6"/>
-          <p:cNvSpPr txBox="1"/>
-          <p:nvPr/>
-        </p:nvSpPr>
-        <p:spPr>
-          <a:xfrm>
             <a:off x="11094415" y="6446520"/>
             <a:ext cx="548640" cy="274320"/>
           </a:xfrm>
@@ -9491,41 +9036,6 @@
         </p:nvSpPr>
         <p:spPr>
           <a:xfrm>
-            <a:off x="2194560" y="6446520"/>
-            <a:ext cx="5943600" cy="274320"/>
-          </a:xfrm>
-          <a:prstGeom prst="rect">
-            <a:avLst/>
-          </a:prstGeom>
-          <a:noFill/>
-        </p:spPr>
-        <p:txBody>
-          <a:bodyPr wrap="square" anchor="t" lIns="0" rIns="0" tIns="0" bIns="0">
-            <a:spAutoFit/>
-          </a:bodyPr>
-          <a:lstStyle/>
-          <a:p>
-            <a:pPr algn="l"/>
-            <a:r>
-              <a:rPr sz="1000" b="1" i="0">
-                <a:solidFill>
-                  <a:srgbClr val="8F989D"/>
-                </a:solidFill>
-                <a:latin typeface="Calibri"/>
-              </a:rPr>
-              <a:t>Inicio 5:10 pm</a:t>
-            </a:r>
-          </a:p>
-        </p:txBody>
-      </p:sp>
-      <p:sp>
-        <p:nvSpPr>
-          <p:cNvPr id="6" name="TextBox 5"/>
-          <p:cNvSpPr txBox="1"/>
-          <p:nvPr/>
-        </p:nvSpPr>
-        <p:spPr>
-          <a:xfrm>
             <a:off x="11094415" y="6446520"/>
             <a:ext cx="548640" cy="274320"/>
           </a:xfrm>
@@ -9555,7 +9065,7 @@
       </p:sp>
       <p:sp>
         <p:nvSpPr>
-          <p:cNvPr id="7" name="TextBox 6"/>
+          <p:cNvPr id="6" name="TextBox 5"/>
           <p:cNvSpPr txBox="1"/>
           <p:nvPr/>
         </p:nvSpPr>
@@ -9959,41 +9469,6 @@
         </p:nvSpPr>
         <p:spPr>
           <a:xfrm>
-            <a:off x="2194560" y="6446520"/>
-            <a:ext cx="5943600" cy="274320"/>
-          </a:xfrm>
-          <a:prstGeom prst="rect">
-            <a:avLst/>
-          </a:prstGeom>
-          <a:noFill/>
-        </p:spPr>
-        <p:txBody>
-          <a:bodyPr wrap="square" anchor="t" lIns="0" rIns="0" tIns="0" bIns="0">
-            <a:spAutoFit/>
-          </a:bodyPr>
-          <a:lstStyle/>
-          <a:p>
-            <a:pPr algn="l"/>
-            <a:r>
-              <a:rPr sz="1000" b="1" i="0">
-                <a:solidFill>
-                  <a:srgbClr val="8F989D"/>
-                </a:solidFill>
-                <a:latin typeface="Calibri"/>
-              </a:rPr>
-              <a:t>Inicio 5:10 pm</a:t>
-            </a:r>
-          </a:p>
-        </p:txBody>
-      </p:sp>
-      <p:sp>
-        <p:nvSpPr>
-          <p:cNvPr id="6" name="TextBox 5"/>
-          <p:cNvSpPr txBox="1"/>
-          <p:nvPr/>
-        </p:nvSpPr>
-        <p:spPr>
-          <a:xfrm>
             <a:off x="11094415" y="6446520"/>
             <a:ext cx="548640" cy="274320"/>
           </a:xfrm>
@@ -10359,41 +9834,6 @@
         </p:nvSpPr>
         <p:spPr>
           <a:xfrm>
-            <a:off x="2194560" y="6446520"/>
-            <a:ext cx="5943600" cy="274320"/>
-          </a:xfrm>
-          <a:prstGeom prst="rect">
-            <a:avLst/>
-          </a:prstGeom>
-          <a:noFill/>
-        </p:spPr>
-        <p:txBody>
-          <a:bodyPr wrap="square" anchor="t" lIns="0" rIns="0" tIns="0" bIns="0">
-            <a:spAutoFit/>
-          </a:bodyPr>
-          <a:lstStyle/>
-          <a:p>
-            <a:pPr algn="l"/>
-            <a:r>
-              <a:rPr sz="1000" b="1" i="0">
-                <a:solidFill>
-                  <a:srgbClr val="8F989D"/>
-                </a:solidFill>
-                <a:latin typeface="Calibri"/>
-              </a:rPr>
-              <a:t>Inicio 5:10 pm</a:t>
-            </a:r>
-          </a:p>
-        </p:txBody>
-      </p:sp>
-      <p:sp>
-        <p:nvSpPr>
-          <p:cNvPr id="6" name="TextBox 5"/>
-          <p:cNvSpPr txBox="1"/>
-          <p:nvPr/>
-        </p:nvSpPr>
-        <p:spPr>
-          <a:xfrm>
             <a:off x="11094415" y="6446520"/>
             <a:ext cx="548640" cy="274320"/>
           </a:xfrm>
@@ -10795,41 +10235,6 @@
         </p:nvSpPr>
         <p:spPr>
           <a:xfrm>
-            <a:off x="2194560" y="6446520"/>
-            <a:ext cx="5943600" cy="274320"/>
-          </a:xfrm>
-          <a:prstGeom prst="rect">
-            <a:avLst/>
-          </a:prstGeom>
-          <a:noFill/>
-        </p:spPr>
-        <p:txBody>
-          <a:bodyPr wrap="square" anchor="t" lIns="0" rIns="0" tIns="0" bIns="0">
-            <a:spAutoFit/>
-          </a:bodyPr>
-          <a:lstStyle/>
-          <a:p>
-            <a:pPr algn="l"/>
-            <a:r>
-              <a:rPr sz="1000" b="1" i="0">
-                <a:solidFill>
-                  <a:srgbClr val="8F989D"/>
-                </a:solidFill>
-                <a:latin typeface="Calibri"/>
-              </a:rPr>
-              <a:t>Inicio 5:10 pm</a:t>
-            </a:r>
-          </a:p>
-        </p:txBody>
-      </p:sp>
-      <p:sp>
-        <p:nvSpPr>
-          <p:cNvPr id="6" name="TextBox 5"/>
-          <p:cNvSpPr txBox="1"/>
-          <p:nvPr/>
-        </p:nvSpPr>
-        <p:spPr>
-          <a:xfrm>
             <a:off x="11094415" y="6446520"/>
             <a:ext cx="548640" cy="274320"/>
           </a:xfrm>
@@ -10859,7 +10264,7 @@
       </p:sp>
       <p:sp>
         <p:nvSpPr>
-          <p:cNvPr id="7" name="TextBox 6"/>
+          <p:cNvPr id="6" name="TextBox 5"/>
           <p:cNvSpPr txBox="1"/>
           <p:nvPr/>
         </p:nvSpPr>

--- a/Pregrado/Trabajo de grado 2/Clases/Sesion 04 - Antecedentes y referentes (Fase I)/Presentacion.pptx
+++ b/Pregrado/Trabajo de grado 2/Clases/Sesion 04 - Antecedentes y referentes (Fase I)/Presentacion.pptx
@@ -22,6 +22,8 @@
     <p:sldId id="270" r:id="rId21"/>
     <p:sldId id="271" r:id="rId22"/>
     <p:sldId id="272" r:id="rId23"/>
+    <p:sldId id="273" r:id="rId24"/>
+    <p:sldId id="274" r:id="rId25"/>
   </p:sldIdLst>
   <p:sldSz cx="12191695" cy="6858000" type="screen4x3"/>
   <p:notesSz cx="6858000" cy="9144000"/>
@@ -5179,7 +5181,7 @@
                 </a:solidFill>
                 <a:latin typeface="Calibri"/>
               </a:rPr>
-              <a:t>Taller — 20 minutos de búsqueda y fichaje</a:t>
+              <a:t>TALLER · Búsqueda y fichaje de antecedentes</a:t>
             </a:r>
           </a:p>
         </p:txBody>
@@ -5192,8 +5194,8 @@
         </p:nvSpPr>
         <p:spPr>
           <a:xfrm>
-            <a:off x="640080" y="1691639"/>
-            <a:ext cx="10911535" cy="4617720"/>
+            <a:off x="640080" y="1280160"/>
+            <a:ext cx="10911535" cy="411480"/>
           </a:xfrm>
           <a:prstGeom prst="rect">
             <a:avLst/>
@@ -5206,6 +5208,41 @@
           </a:bodyPr>
           <a:lstStyle/>
           <a:p>
+            <a:pPr algn="ctr"/>
+            <a:r>
+              <a:rPr sz="1500" b="0" i="0">
+                <a:solidFill>
+                  <a:srgbClr val="2B2B2B"/>
+                </a:solidFill>
+                <a:latin typeface="Calibri"/>
+              </a:rPr>
+              <a:t>Individual · el Docente acompaña la búsqueda de quienes no encuentren resultados</a:t>
+            </a:r>
+          </a:p>
+        </p:txBody>
+      </p:sp>
+      <p:sp>
+        <p:nvSpPr>
+          <p:cNvPr id="5" name="TextBox 4"/>
+          <p:cNvSpPr txBox="1"/>
+          <p:nvPr/>
+        </p:nvSpPr>
+        <p:spPr>
+          <a:xfrm>
+            <a:off x="640080" y="2011679"/>
+            <a:ext cx="10911535" cy="4297680"/>
+          </a:xfrm>
+          <a:prstGeom prst="rect">
+            <a:avLst/>
+          </a:prstGeom>
+          <a:noFill/>
+        </p:spPr>
+        <p:txBody>
+          <a:bodyPr wrap="square" anchor="t" lIns="0" rIns="0" tIns="0" bIns="0">
+            <a:spAutoFit/>
+          </a:bodyPr>
+          <a:lstStyle/>
+          <a:p>
             <a:pPr>
               <a:spcAft>
                 <a:spcPts val="1000"/>
@@ -5227,260 +5264,16 @@
                 </a:solidFill>
                 <a:latin typeface="Calibri"/>
               </a:rPr>
-              <a:t>Consigna:</a:t>
-            </a:r>
-            <a:r>
-              <a:rPr sz="1600" b="0" i="0">
-                <a:solidFill>
-                  <a:srgbClr val="2B2B2B"/>
-                </a:solidFill>
-                <a:latin typeface="Calibri"/>
-              </a:rPr>
-              <a:t> en un documento llamado `S04_Antecedentes_Apellido`:</a:t>
-            </a:r>
-          </a:p>
-          <a:p>
-            <a:pPr lvl="1">
-              <a:spcAft>
-                <a:spcPts val="600"/>
-              </a:spcAft>
-            </a:pPr>
-            <a:r>
-              <a:rPr sz="1500" b="0" i="0">
-                <a:solidFill>
-                  <a:srgbClr val="2B2B2B"/>
-                </a:solidFill>
-                <a:latin typeface="Calibri"/>
-              </a:rPr>
-              <a:t>●   </a:t>
-            </a:r>
-            <a:r>
-              <a:rPr sz="1500" b="1" i="0">
-                <a:solidFill>
-                  <a:srgbClr val="2B2B2B"/>
-                </a:solidFill>
-                <a:latin typeface="Calibri"/>
-              </a:rPr>
-              <a:t>(1)</a:t>
-            </a:r>
-            <a:r>
-              <a:rPr sz="1500" b="0" i="0">
-                <a:solidFill>
-                  <a:srgbClr val="2B2B2B"/>
-                </a:solidFill>
-                <a:latin typeface="Calibri"/>
-              </a:rPr>
-              <a:t> Busque y elija </a:t>
-            </a:r>
-            <a:r>
-              <a:rPr sz="1500" b="1" i="0">
-                <a:solidFill>
-                  <a:srgbClr val="2B2B2B"/>
-                </a:solidFill>
-                <a:latin typeface="Calibri"/>
-              </a:rPr>
-              <a:t>cuatro antecedentes</a:t>
-            </a:r>
-            <a:r>
-              <a:rPr sz="1500" b="0" i="0">
-                <a:solidFill>
-                  <a:srgbClr val="2B2B2B"/>
-                </a:solidFill>
-                <a:latin typeface="Calibri"/>
-              </a:rPr>
-              <a:t>, con al menos </a:t>
-            </a:r>
-            <a:r>
-              <a:rPr sz="1500" b="1" i="0">
-                <a:solidFill>
-                  <a:srgbClr val="2B2B2B"/>
-                </a:solidFill>
-                <a:latin typeface="Calibri"/>
-              </a:rPr>
-              <a:t>uno nacional o local</a:t>
-            </a:r>
-            <a:r>
-              <a:rPr sz="1500" b="0" i="0">
-                <a:solidFill>
-                  <a:srgbClr val="2B2B2B"/>
-                </a:solidFill>
-                <a:latin typeface="Calibri"/>
-              </a:rPr>
-              <a:t> y </a:t>
-            </a:r>
-            <a:r>
-              <a:rPr sz="1500" b="1" i="0">
-                <a:solidFill>
-                  <a:srgbClr val="2B2B2B"/>
-                </a:solidFill>
-                <a:latin typeface="Calibri"/>
-              </a:rPr>
-              <a:t>uno internacional</a:t>
-            </a:r>
-            <a:r>
-              <a:rPr sz="1500" b="0" i="0">
-                <a:solidFill>
-                  <a:srgbClr val="2B2B2B"/>
-                </a:solidFill>
-                <a:latin typeface="Calibri"/>
-              </a:rPr>
-              <a:t>.</a:t>
-            </a:r>
-          </a:p>
-          <a:p>
-            <a:pPr lvl="1">
-              <a:spcAft>
-                <a:spcPts val="600"/>
-              </a:spcAft>
-            </a:pPr>
-            <a:r>
-              <a:rPr sz="1500" b="0" i="0">
-                <a:solidFill>
-                  <a:srgbClr val="2B2B2B"/>
-                </a:solidFill>
-                <a:latin typeface="Calibri"/>
-              </a:rPr>
-              <a:t>●   </a:t>
-            </a:r>
-            <a:r>
-              <a:rPr sz="1500" b="1" i="0">
-                <a:solidFill>
-                  <a:srgbClr val="2B2B2B"/>
-                </a:solidFill>
-                <a:latin typeface="Calibri"/>
-              </a:rPr>
-              <a:t>(2)</a:t>
-            </a:r>
-            <a:r>
-              <a:rPr sz="1500" b="0" i="0">
-                <a:solidFill>
-                  <a:srgbClr val="2B2B2B"/>
-                </a:solidFill>
-                <a:latin typeface="Calibri"/>
-              </a:rPr>
-              <a:t> Haga una </a:t>
-            </a:r>
-            <a:r>
-              <a:rPr sz="1500" b="1" i="0">
-                <a:solidFill>
-                  <a:srgbClr val="2B2B2B"/>
-                </a:solidFill>
-                <a:latin typeface="Calibri"/>
-              </a:rPr>
-              <a:t>ficha</a:t>
-            </a:r>
-            <a:r>
-              <a:rPr sz="1500" b="0" i="0">
-                <a:solidFill>
-                  <a:srgbClr val="2B2B2B"/>
-                </a:solidFill>
-                <a:latin typeface="Calibri"/>
-              </a:rPr>
-              <a:t> por cada uno con los cinco campos, redactada con sus palabras.</a:t>
-            </a:r>
-          </a:p>
-          <a:p>
-            <a:pPr lvl="1">
-              <a:spcAft>
-                <a:spcPts val="600"/>
-              </a:spcAft>
-            </a:pPr>
-            <a:r>
-              <a:rPr sz="1500" b="0" i="0">
-                <a:solidFill>
-                  <a:srgbClr val="2B2B2B"/>
-                </a:solidFill>
-                <a:latin typeface="Calibri"/>
-              </a:rPr>
-              <a:t>●   </a:t>
-            </a:r>
-            <a:r>
-              <a:rPr sz="1500" b="1" i="0">
-                <a:solidFill>
-                  <a:srgbClr val="2B2B2B"/>
-                </a:solidFill>
-                <a:latin typeface="Calibri"/>
-              </a:rPr>
-              <a:t>(3)</a:t>
-            </a:r>
-            <a:r>
-              <a:rPr sz="1500" b="0" i="0">
-                <a:solidFill>
-                  <a:srgbClr val="2B2B2B"/>
-                </a:solidFill>
-                <a:latin typeface="Calibri"/>
-              </a:rPr>
-              <a:t> Genere las cuatro referencias en </a:t>
-            </a:r>
-            <a:r>
-              <a:rPr sz="1500" b="1" i="0">
-                <a:solidFill>
-                  <a:srgbClr val="2B2B2B"/>
-                </a:solidFill>
-                <a:latin typeface="Calibri"/>
-              </a:rPr>
-              <a:t>APA 7</a:t>
-            </a:r>
-            <a:r>
-              <a:rPr sz="1500" b="0" i="0">
-                <a:solidFill>
-                  <a:srgbClr val="2B2B2B"/>
-                </a:solidFill>
-                <a:latin typeface="Calibri"/>
-              </a:rPr>
-              <a:t> con ZoteroBib y péguelas en la sección Referencias.</a:t>
-            </a:r>
-          </a:p>
-          <a:p>
-            <a:pPr lvl="1">
-              <a:spcAft>
-                <a:spcPts val="600"/>
-              </a:spcAft>
-            </a:pPr>
-            <a:r>
-              <a:rPr sz="1500" b="0" i="0">
-                <a:solidFill>
-                  <a:srgbClr val="2B2B2B"/>
-                </a:solidFill>
-                <a:latin typeface="Calibri"/>
-              </a:rPr>
-              <a:t>●   </a:t>
-            </a:r>
-            <a:r>
-              <a:rPr sz="1500" b="1" i="0">
-                <a:solidFill>
-                  <a:srgbClr val="2B2B2B"/>
-                </a:solidFill>
-                <a:latin typeface="Calibri"/>
-              </a:rPr>
-              <a:t>(4)</a:t>
-            </a:r>
-            <a:r>
-              <a:rPr sz="1500" b="0" i="0">
-                <a:solidFill>
-                  <a:srgbClr val="2B2B2B"/>
-                </a:solidFill>
-                <a:latin typeface="Calibri"/>
-              </a:rPr>
-              <a:t> Escriba el </a:t>
-            </a:r>
-            <a:r>
-              <a:rPr sz="1500" b="1" i="0">
-                <a:solidFill>
-                  <a:srgbClr val="2B2B2B"/>
-                </a:solidFill>
-                <a:latin typeface="Calibri"/>
-              </a:rPr>
-              <a:t>párrafo puente</a:t>
-            </a:r>
-            <a:r>
-              <a:rPr sz="1500" b="0" i="0">
-                <a:solidFill>
-                  <a:srgbClr val="2B2B2B"/>
-                </a:solidFill>
-                <a:latin typeface="Calibri"/>
-              </a:rPr>
-              <a:t> con la fórmula coinciden / difieren / vacío.</a:t>
+              <a:t>Al final tiene:</a:t>
+            </a:r>
+            <a:r>
+              <a:rPr sz="1600" b="0" i="0">
+                <a:solidFill>
+                  <a:srgbClr val="2B2B2B"/>
+                </a:solidFill>
+                <a:latin typeface="Calibri"/>
+              </a:rPr>
+              <a:t> cuatro antecedentes fichados, sus referencias en APA 7 y el párrafo puente.</a:t>
             </a:r>
           </a:p>
           <a:p>
@@ -5505,16 +5298,70 @@
                 </a:solidFill>
                 <a:latin typeface="Calibri"/>
               </a:rPr>
-              <a:t>Tiempo:</a:t>
-            </a:r>
-            <a:r>
-              <a:rPr sz="1600" b="0" i="0">
-                <a:solidFill>
-                  <a:srgbClr val="2B2B2B"/>
-                </a:solidFill>
-                <a:latin typeface="Calibri"/>
-              </a:rPr>
-              <a:t> 20 minutos; el Docente acompaña la búsqueda de quienes no encuentren resultados.</a:t>
+              <a:t>Paso 1</a:t>
+            </a:r>
+            <a:r>
+              <a:rPr sz="1600" b="0" i="0">
+                <a:solidFill>
+                  <a:srgbClr val="2B2B2B"/>
+                </a:solidFill>
+                <a:latin typeface="Calibri"/>
+              </a:rPr>
+              <a:t> · Busque y elija </a:t>
+            </a:r>
+            <a:r>
+              <a:rPr sz="1600" b="1" i="0">
+                <a:solidFill>
+                  <a:srgbClr val="2B2B2B"/>
+                </a:solidFill>
+                <a:latin typeface="Calibri"/>
+              </a:rPr>
+              <a:t>cuatro antecedentes</a:t>
+            </a:r>
+            <a:r>
+              <a:rPr sz="1600" b="0" i="0">
+                <a:solidFill>
+                  <a:srgbClr val="2B2B2B"/>
+                </a:solidFill>
+                <a:latin typeface="Calibri"/>
+              </a:rPr>
+              <a:t>, con al menos </a:t>
+            </a:r>
+            <a:r>
+              <a:rPr sz="1600" b="1" i="0">
+                <a:solidFill>
+                  <a:srgbClr val="2B2B2B"/>
+                </a:solidFill>
+                <a:latin typeface="Calibri"/>
+              </a:rPr>
+              <a:t>uno nacional o local</a:t>
+            </a:r>
+            <a:r>
+              <a:rPr sz="1600" b="0" i="0">
+                <a:solidFill>
+                  <a:srgbClr val="2B2B2B"/>
+                </a:solidFill>
+                <a:latin typeface="Calibri"/>
+              </a:rPr>
+              <a:t> y </a:t>
+            </a:r>
+            <a:r>
+              <a:rPr sz="1600" b="1" i="0">
+                <a:solidFill>
+                  <a:srgbClr val="2B2B2B"/>
+                </a:solidFill>
+                <a:latin typeface="Calibri"/>
+              </a:rPr>
+              <a:t>uno internacional</a:t>
+            </a:r>
+            <a:r>
+              <a:rPr sz="1600" b="0" i="0">
+                <a:solidFill>
+                  <a:srgbClr val="2B2B2B"/>
+                </a:solidFill>
+                <a:latin typeface="Calibri"/>
+              </a:rPr>
+              <a:t>.</a:t>
             </a:r>
           </a:p>
           <a:p>
@@ -5539,16 +5386,34 @@
                 </a:solidFill>
                 <a:latin typeface="Calibri"/>
               </a:rPr>
-              <a:t>Criterio de éxito:</a:t>
-            </a:r>
-            <a:r>
-              <a:rPr sz="1600" b="0" i="0">
-                <a:solidFill>
-                  <a:srgbClr val="2B2B2B"/>
-                </a:solidFill>
-                <a:latin typeface="Calibri"/>
-              </a:rPr>
-              <a:t> cada ficha tiene su línea "me aporta…" y el párrafo puente nombra explícitamente el vacío que llena su proyecto.</a:t>
+              <a:t>Paso 2</a:t>
+            </a:r>
+            <a:r>
+              <a:rPr sz="1600" b="0" i="0">
+                <a:solidFill>
+                  <a:srgbClr val="2B2B2B"/>
+                </a:solidFill>
+                <a:latin typeface="Calibri"/>
+              </a:rPr>
+              <a:t> · Haga una </a:t>
+            </a:r>
+            <a:r>
+              <a:rPr sz="1600" b="1" i="0">
+                <a:solidFill>
+                  <a:srgbClr val="2B2B2B"/>
+                </a:solidFill>
+                <a:latin typeface="Calibri"/>
+              </a:rPr>
+              <a:t>ficha</a:t>
+            </a:r>
+            <a:r>
+              <a:rPr sz="1600" b="0" i="0">
+                <a:solidFill>
+                  <a:srgbClr val="2B2B2B"/>
+                </a:solidFill>
+                <a:latin typeface="Calibri"/>
+              </a:rPr>
+              <a:t> por cada uno con los cinco campos, redactada con sus palabras.</a:t>
             </a:r>
           </a:p>
           <a:p>
@@ -5564,14 +5429,154 @@
                 </a:solidFill>
                 <a:latin typeface="Calibri"/>
               </a:rPr>
-              <a:t>–   Si una búsqueda no da nada en tres intentos, cambie una palabra clave: el problema casi siempre es el vocabulario.</a:t>
-            </a:r>
-          </a:p>
-        </p:txBody>
-      </p:sp>
-      <p:sp>
-        <p:nvSpPr>
-          <p:cNvPr id="5" name="TextBox 4"/>
+              <a:t>–   </a:t>
+            </a:r>
+            <a:r>
+              <a:rPr sz="1600" b="1" i="0">
+                <a:solidFill>
+                  <a:srgbClr val="2B2B2B"/>
+                </a:solidFill>
+                <a:latin typeface="Calibri"/>
+              </a:rPr>
+              <a:t>Paso 3</a:t>
+            </a:r>
+            <a:r>
+              <a:rPr sz="1600" b="0" i="0">
+                <a:solidFill>
+                  <a:srgbClr val="2B2B2B"/>
+                </a:solidFill>
+                <a:latin typeface="Calibri"/>
+              </a:rPr>
+              <a:t> · Genere las cuatro referencias en </a:t>
+            </a:r>
+            <a:r>
+              <a:rPr sz="1600" b="1" i="0">
+                <a:solidFill>
+                  <a:srgbClr val="2B2B2B"/>
+                </a:solidFill>
+                <a:latin typeface="Calibri"/>
+              </a:rPr>
+              <a:t>APA 7</a:t>
+            </a:r>
+            <a:r>
+              <a:rPr sz="1600" b="0" i="0">
+                <a:solidFill>
+                  <a:srgbClr val="2B2B2B"/>
+                </a:solidFill>
+                <a:latin typeface="Calibri"/>
+              </a:rPr>
+              <a:t> con ZoteroBib y péguelas en la sección Referencias.</a:t>
+            </a:r>
+          </a:p>
+          <a:p>
+            <a:pPr>
+              <a:spcAft>
+                <a:spcPts val="1000"/>
+              </a:spcAft>
+            </a:pPr>
+            <a:r>
+              <a:rPr sz="1600" b="0" i="0">
+                <a:solidFill>
+                  <a:srgbClr val="2B2B2B"/>
+                </a:solidFill>
+                <a:latin typeface="Calibri"/>
+              </a:rPr>
+              <a:t>–   </a:t>
+            </a:r>
+            <a:r>
+              <a:rPr sz="1600" b="1" i="0">
+                <a:solidFill>
+                  <a:srgbClr val="2B2B2B"/>
+                </a:solidFill>
+                <a:latin typeface="Calibri"/>
+              </a:rPr>
+              <a:t>Paso 4</a:t>
+            </a:r>
+            <a:r>
+              <a:rPr sz="1600" b="0" i="0">
+                <a:solidFill>
+                  <a:srgbClr val="2B2B2B"/>
+                </a:solidFill>
+                <a:latin typeface="Calibri"/>
+              </a:rPr>
+              <a:t> · Escriba el </a:t>
+            </a:r>
+            <a:r>
+              <a:rPr sz="1600" b="1" i="0">
+                <a:solidFill>
+                  <a:srgbClr val="2B2B2B"/>
+                </a:solidFill>
+                <a:latin typeface="Calibri"/>
+              </a:rPr>
+              <a:t>párrafo puente</a:t>
+            </a:r>
+            <a:r>
+              <a:rPr sz="1600" b="0" i="0">
+                <a:solidFill>
+                  <a:srgbClr val="2B2B2B"/>
+                </a:solidFill>
+                <a:latin typeface="Calibri"/>
+              </a:rPr>
+              <a:t> con la fórmula coinciden / difieren / vacío.</a:t>
+            </a:r>
+          </a:p>
+          <a:p>
+            <a:pPr>
+              <a:spcAft>
+                <a:spcPts val="1000"/>
+              </a:spcAft>
+            </a:pPr>
+            <a:r>
+              <a:rPr sz="1600" b="0" i="0">
+                <a:solidFill>
+                  <a:srgbClr val="2B2B2B"/>
+                </a:solidFill>
+                <a:latin typeface="Calibri"/>
+              </a:rPr>
+              <a:t>–   </a:t>
+            </a:r>
+            <a:r>
+              <a:rPr sz="1600" b="1" i="0">
+                <a:solidFill>
+                  <a:srgbClr val="2B2B2B"/>
+                </a:solidFill>
+                <a:latin typeface="Calibri"/>
+              </a:rPr>
+              <a:t>En clase, sin falta:</a:t>
+            </a:r>
+            <a:r>
+              <a:rPr sz="1600" b="0" i="0">
+                <a:solidFill>
+                  <a:srgbClr val="2B2B2B"/>
+                </a:solidFill>
+                <a:latin typeface="Calibri"/>
+              </a:rPr>
+              <a:t> los </a:t>
+            </a:r>
+            <a:r>
+              <a:rPr sz="1600" b="1" i="0">
+                <a:solidFill>
+                  <a:srgbClr val="2B2B2B"/>
+                </a:solidFill>
+                <a:latin typeface="Calibri"/>
+              </a:rPr>
+              <a:t>pasos 1 a 2</a:t>
+            </a:r>
+            <a:r>
+              <a:rPr sz="1600" b="0" i="0">
+                <a:solidFill>
+                  <a:srgbClr val="2B2B2B"/>
+                </a:solidFill>
+                <a:latin typeface="Calibri"/>
+              </a:rPr>
+              <a:t>. Del 3 en adelante puede quedar en trabajo autónomo, pero antes de la próxima sesión.</a:t>
+            </a:r>
+          </a:p>
+        </p:txBody>
+      </p:sp>
+      <p:sp>
+        <p:nvSpPr>
+          <p:cNvPr id="6" name="TextBox 5"/>
           <p:cNvSpPr txBox="1"/>
           <p:nvPr/>
         </p:nvSpPr>
@@ -5704,7 +5709,7 @@
                 </a:solidFill>
                 <a:latin typeface="Calibri"/>
               </a:rPr>
-              <a:t>Autoevaluación antes de subir el archivo</a:t>
+              <a:t>TALLER · cómo se revisa y dónde se entrega</a:t>
             </a:r>
           </a:p>
         </p:txBody>
@@ -5717,8 +5722,8 @@
         </p:nvSpPr>
         <p:spPr>
           <a:xfrm>
-            <a:off x="640080" y="1691639"/>
-            <a:ext cx="10911535" cy="4617720"/>
+            <a:off x="640080" y="1280160"/>
+            <a:ext cx="10911535" cy="411480"/>
           </a:xfrm>
           <a:prstGeom prst="rect">
             <a:avLst/>
@@ -5731,6 +5736,41 @@
           </a:bodyPr>
           <a:lstStyle/>
           <a:p>
+            <a:pPr algn="ctr"/>
+            <a:r>
+              <a:rPr sz="1500" b="0" i="0">
+                <a:solidFill>
+                  <a:srgbClr val="2B2B2B"/>
+                </a:solidFill>
+                <a:latin typeface="Calibri"/>
+              </a:rPr>
+              <a:t>Búsqueda y fichaje de antecedentes</a:t>
+            </a:r>
+          </a:p>
+        </p:txBody>
+      </p:sp>
+      <p:sp>
+        <p:nvSpPr>
+          <p:cNvPr id="5" name="TextBox 4"/>
+          <p:cNvSpPr txBox="1"/>
+          <p:nvPr/>
+        </p:nvSpPr>
+        <p:spPr>
+          <a:xfrm>
+            <a:off x="640080" y="2011679"/>
+            <a:ext cx="10911535" cy="4297680"/>
+          </a:xfrm>
+          <a:prstGeom prst="rect">
+            <a:avLst/>
+          </a:prstGeom>
+          <a:noFill/>
+        </p:spPr>
+        <p:txBody>
+          <a:bodyPr wrap="square" anchor="t" lIns="0" rIns="0" tIns="0" bIns="0">
+            <a:spAutoFit/>
+          </a:bodyPr>
+          <a:lstStyle/>
+          <a:p>
             <a:pPr>
               <a:spcAft>
                 <a:spcPts val="1000"/>
@@ -5743,7 +5783,109 @@
                 </a:solidFill>
                 <a:latin typeface="Calibri"/>
               </a:rPr>
-              <a:t>–   Hay cuatro fichas, con al menos una fuente nacional o local y una internacional.</a:t>
+              <a:t>–   </a:t>
+            </a:r>
+            <a:r>
+              <a:rPr sz="1600" b="1" i="0">
+                <a:solidFill>
+                  <a:srgbClr val="2B2B2B"/>
+                </a:solidFill>
+                <a:latin typeface="Calibri"/>
+              </a:rPr>
+              <a:t>Quedó bien si</a:t>
+            </a:r>
+            <a:r>
+              <a:rPr sz="1600" b="0" i="0">
+                <a:solidFill>
+                  <a:srgbClr val="2B2B2B"/>
+                </a:solidFill>
+                <a:latin typeface="Calibri"/>
+              </a:rPr>
+              <a:t> —compruébelo usted antes de cerrar el documento—:</a:t>
+            </a:r>
+          </a:p>
+          <a:p>
+            <a:pPr lvl="1">
+              <a:spcAft>
+                <a:spcPts val="600"/>
+              </a:spcAft>
+            </a:pPr>
+            <a:r>
+              <a:rPr sz="1500" b="0" i="0">
+                <a:solidFill>
+                  <a:srgbClr val="2B2B2B"/>
+                </a:solidFill>
+                <a:latin typeface="Calibri"/>
+              </a:rPr>
+              <a:t>●   Cada ficha tiene su línea </a:t>
+            </a:r>
+            <a:r>
+              <a:rPr sz="1500" b="1" i="0">
+                <a:solidFill>
+                  <a:srgbClr val="2B2B2B"/>
+                </a:solidFill>
+                <a:latin typeface="Calibri"/>
+              </a:rPr>
+              <a:t>«me aporta…»</a:t>
+            </a:r>
+            <a:r>
+              <a:rPr sz="1500" b="0" i="0">
+                <a:solidFill>
+                  <a:srgbClr val="2B2B2B"/>
+                </a:solidFill>
+                <a:latin typeface="Calibri"/>
+              </a:rPr>
+              <a:t>.</a:t>
+            </a:r>
+          </a:p>
+          <a:p>
+            <a:pPr lvl="1">
+              <a:spcAft>
+                <a:spcPts val="600"/>
+              </a:spcAft>
+            </a:pPr>
+            <a:r>
+              <a:rPr sz="1500" b="0" i="0">
+                <a:solidFill>
+                  <a:srgbClr val="2B2B2B"/>
+                </a:solidFill>
+                <a:latin typeface="Calibri"/>
+              </a:rPr>
+              <a:t>●   El párrafo puente </a:t>
+            </a:r>
+            <a:r>
+              <a:rPr sz="1500" b="1" i="0">
+                <a:solidFill>
+                  <a:srgbClr val="2B2B2B"/>
+                </a:solidFill>
+                <a:latin typeface="Calibri"/>
+              </a:rPr>
+              <a:t>nombra explícitamente el vacío</a:t>
+            </a:r>
+            <a:r>
+              <a:rPr sz="1500" b="0" i="0">
+                <a:solidFill>
+                  <a:srgbClr val="2B2B2B"/>
+                </a:solidFill>
+                <a:latin typeface="Calibri"/>
+              </a:rPr>
+              <a:t> que llena su proyecto.</a:t>
+            </a:r>
+          </a:p>
+          <a:p>
+            <a:pPr lvl="1">
+              <a:spcAft>
+                <a:spcPts val="600"/>
+              </a:spcAft>
+            </a:pPr>
+            <a:r>
+              <a:rPr sz="1500" b="0" i="0">
+                <a:solidFill>
+                  <a:srgbClr val="2B2B2B"/>
+                </a:solidFill>
+                <a:latin typeface="Calibri"/>
+              </a:rPr>
+              <a:t>●   Las cuatro referencias están en APA 7, no pegadas del buscador.</a:t>
             </a:r>
           </a:p>
           <a:p>
@@ -5759,7 +5901,25 @@
                 </a:solidFill>
                 <a:latin typeface="Calibri"/>
               </a:rPr>
-              <a:t>–   Ninguna ficha contiene texto copiado del resumen original.</a:t>
+              <a:t>–   </a:t>
+            </a:r>
+            <a:r>
+              <a:rPr sz="1600" b="1" i="0">
+                <a:solidFill>
+                  <a:srgbClr val="2B2B2B"/>
+                </a:solidFill>
+                <a:latin typeface="Calibri"/>
+              </a:rPr>
+              <a:t>Plan B:</a:t>
+            </a:r>
+            <a:r>
+              <a:rPr sz="1600" b="0" i="0">
+                <a:solidFill>
+                  <a:srgbClr val="2B2B2B"/>
+                </a:solidFill>
+                <a:latin typeface="Calibri"/>
+              </a:rPr>
+              <a:t> Si una búsqueda no da nada en tres intentos, cambie una palabra clave: el problema casi siempre es el vocabulario, no el tema.</a:t>
             </a:r>
           </a:p>
           <a:p>
@@ -5775,7 +5935,43 @@
                 </a:solidFill>
                 <a:latin typeface="Calibri"/>
               </a:rPr>
-              <a:t>–   Las cinco casillas están llenas en las cuatro fichas, incluida "me aporta…".</a:t>
+              <a:t>–   </a:t>
+            </a:r>
+            <a:r>
+              <a:rPr sz="1600" b="1" i="0">
+                <a:solidFill>
+                  <a:srgbClr val="2B2B2B"/>
+                </a:solidFill>
+                <a:latin typeface="Calibri"/>
+              </a:rPr>
+              <a:t>Hoy no se sube nada al aula:</a:t>
+            </a:r>
+            <a:r>
+              <a:rPr sz="1600" b="0" i="0">
+                <a:solidFill>
+                  <a:srgbClr val="2B2B2B"/>
+                </a:solidFill>
+                <a:latin typeface="Calibri"/>
+              </a:rPr>
+              <a:t> guarde `S04_Antecedentes_Apellido` (Google Doc o PDF) en su Drive y tráigalo a la próxima sesión. Es un </a:t>
+            </a:r>
+            <a:r>
+              <a:rPr sz="1600" b="1" i="0">
+                <a:solidFill>
+                  <a:srgbClr val="2B2B2B"/>
+                </a:solidFill>
+                <a:latin typeface="Calibri"/>
+              </a:rPr>
+              <a:t>avance formativo</a:t>
+            </a:r>
+            <a:r>
+              <a:rPr sz="1600" b="0" i="0">
+                <a:solidFill>
+                  <a:srgbClr val="2B2B2B"/>
+                </a:solidFill>
+                <a:latin typeface="Calibri"/>
+              </a:rPr>
+              <a:t>, se revisa en clase.</a:t>
             </a:r>
           </a:p>
           <a:p>
@@ -5791,78 +5987,104 @@
                 </a:solidFill>
                 <a:latin typeface="Calibri"/>
               </a:rPr>
-              <a:t>–   Cada aporte es específico: dice qué se lleva, no "sirve de referencia".</a:t>
-            </a:r>
-          </a:p>
-          <a:p>
-            <a:pPr>
-              <a:spcAft>
-                <a:spcPts val="1000"/>
-              </a:spcAft>
-            </a:pPr>
-            <a:r>
-              <a:rPr sz="1600" b="0" i="0">
-                <a:solidFill>
-                  <a:srgbClr val="2B2B2B"/>
-                </a:solidFill>
-                <a:latin typeface="Calibri"/>
-              </a:rPr>
-              <a:t>–   Todas las fuentes son estudios con método verificable (nada de blogs ni páginas comerciales).</a:t>
-            </a:r>
-          </a:p>
-          <a:p>
-            <a:pPr>
-              <a:spcAft>
-                <a:spcPts val="1000"/>
-              </a:spcAft>
-            </a:pPr>
-            <a:r>
-              <a:rPr sz="1600" b="0" i="0">
-                <a:solidFill>
-                  <a:srgbClr val="2B2B2B"/>
-                </a:solidFill>
-                <a:latin typeface="Calibri"/>
-              </a:rPr>
-              <a:t>–   Las cuatro referencias están en APA 7 y revisadas a mano después de ZoteroBib.</a:t>
-            </a:r>
-          </a:p>
-          <a:p>
-            <a:pPr>
-              <a:spcAft>
-                <a:spcPts val="1000"/>
-              </a:spcAft>
-            </a:pPr>
-            <a:r>
-              <a:rPr sz="1600" b="0" i="0">
-                <a:solidFill>
-                  <a:srgbClr val="2B2B2B"/>
-                </a:solidFill>
-                <a:latin typeface="Calibri"/>
-              </a:rPr>
-              <a:t>–   El párrafo puente tiene los tres movimientos y termina nombrando el vacío.</a:t>
-            </a:r>
-          </a:p>
-          <a:p>
-            <a:pPr>
-              <a:spcAft>
-                <a:spcPts val="1000"/>
-              </a:spcAft>
-            </a:pPr>
-            <a:r>
-              <a:rPr sz="1600" b="0" i="0">
-                <a:solidFill>
-                  <a:srgbClr val="2B2B2B"/>
-                </a:solidFill>
-                <a:latin typeface="Calibri"/>
-              </a:rPr>
-              <a:t>–   El archivo se llama `S04_Antecedentes_Apellido`.</a:t>
-            </a:r>
-          </a:p>
-        </p:txBody>
-      </p:sp>
-      <p:sp>
-        <p:nvSpPr>
-          <p:cNvPr id="5" name="TextBox 4"/>
+              <a:t>–   </a:t>
+            </a:r>
+            <a:r>
+              <a:rPr sz="1600" b="1" i="0">
+                <a:solidFill>
+                  <a:srgbClr val="2B2B2B"/>
+                </a:solidFill>
+                <a:latin typeface="Calibri"/>
+              </a:rPr>
+              <a:t>Esto alimenta:</a:t>
+            </a:r>
+            <a:r>
+              <a:rPr sz="1600" b="0" i="0">
+                <a:solidFill>
+                  <a:srgbClr val="2B2B2B"/>
+                </a:solidFill>
+                <a:latin typeface="Calibri"/>
+              </a:rPr>
+              <a:t> </a:t>
+            </a:r>
+            <a:r>
+              <a:rPr sz="1600" b="1" i="0">
+                <a:solidFill>
+                  <a:srgbClr val="2B2B2B"/>
+                </a:solidFill>
+                <a:latin typeface="Calibri"/>
+              </a:rPr>
+              <a:t>ACA Final</a:t>
+            </a:r>
+            <a:r>
+              <a:rPr sz="1600" b="0" i="0">
+                <a:solidFill>
+                  <a:srgbClr val="2B2B2B"/>
+                </a:solidFill>
+                <a:latin typeface="Calibri"/>
+              </a:rPr>
+              <a:t> —tarea, 32,8%—, el documento que </a:t>
+            </a:r>
+            <a:r>
+              <a:rPr sz="1600" b="1" i="0">
+                <a:solidFill>
+                  <a:srgbClr val="2B2B2B"/>
+                </a:solidFill>
+                <a:latin typeface="Calibri"/>
+              </a:rPr>
+              <a:t>sí</a:t>
+            </a:r>
+            <a:r>
+              <a:rPr sz="1600" b="0" i="0">
+                <a:solidFill>
+                  <a:srgbClr val="2B2B2B"/>
+                </a:solidFill>
+                <a:latin typeface="Calibri"/>
+              </a:rPr>
+              <a:t> recibe </a:t>
+            </a:r>
+            <a:r>
+              <a:rPr sz="1600" b="1" i="0">
+                <a:solidFill>
+                  <a:srgbClr val="2B2B2B"/>
+                </a:solidFill>
+                <a:latin typeface="Calibri"/>
+              </a:rPr>
+              <a:t>CDigital</a:t>
+            </a:r>
+            <a:r>
+              <a:rPr sz="1600" b="0" i="0">
+                <a:solidFill>
+                  <a:srgbClr val="2B2B2B"/>
+                </a:solidFill>
+                <a:latin typeface="Calibri"/>
+              </a:rPr>
+              <a:t>; cierra en la semana de la </a:t>
+            </a:r>
+            <a:r>
+              <a:rPr sz="1600" b="1" i="0">
+                <a:solidFill>
+                  <a:srgbClr val="2B2B2B"/>
+                </a:solidFill>
+                <a:latin typeface="Calibri"/>
+              </a:rPr>
+              <a:t>Sesión 11</a:t>
+            </a:r>
+            <a:r>
+              <a:rPr sz="1600" b="0" i="0">
+                <a:solidFill>
+                  <a:srgbClr val="2B2B2B"/>
+                </a:solidFill>
+                <a:latin typeface="Calibri"/>
+              </a:rPr>
+              <a:t>.</a:t>
+            </a:r>
+          </a:p>
+        </p:txBody>
+      </p:sp>
+      <p:sp>
+        <p:nvSpPr>
+          <p:cNvPr id="6" name="TextBox 5"/>
           <p:cNvSpPr txBox="1"/>
           <p:nvPr/>
         </p:nvSpPr>
@@ -5995,7 +6217,7 @@
                 </a:solidFill>
                 <a:latin typeface="Calibri"/>
               </a:rPr>
-              <a:t>Trabajo autónomo y qué viene la próxima sesión</a:t>
+              <a:t>Autoevaluación antes de subir el archivo</a:t>
             </a:r>
           </a:p>
         </p:txBody>
@@ -6034,59 +6256,7 @@
                 </a:solidFill>
                 <a:latin typeface="Calibri"/>
               </a:rPr>
-              <a:t>–   </a:t>
-            </a:r>
-            <a:r>
-              <a:rPr sz="1600" b="1" i="0">
-                <a:solidFill>
-                  <a:srgbClr val="2B2B2B"/>
-                </a:solidFill>
-                <a:latin typeface="Calibri"/>
-              </a:rPr>
-              <a:t>Entrega:</a:t>
-            </a:r>
-            <a:r>
-              <a:rPr sz="1600" b="0" i="0">
-                <a:solidFill>
-                  <a:srgbClr val="2B2B2B"/>
-                </a:solidFill>
-                <a:latin typeface="Calibri"/>
-              </a:rPr>
-              <a:t> suba `S04_Antecedentes_Apellido` a </a:t>
-            </a:r>
-            <a:r>
-              <a:rPr sz="1600" b="1" i="0">
-                <a:solidFill>
-                  <a:srgbClr val="2B2B2B"/>
-                </a:solidFill>
-                <a:latin typeface="Calibri"/>
-              </a:rPr>
-              <a:t>CDigital</a:t>
-            </a:r>
-            <a:r>
-              <a:rPr sz="1600" b="0" i="0">
-                <a:solidFill>
-                  <a:srgbClr val="2B2B2B"/>
-                </a:solidFill>
-                <a:latin typeface="Calibri"/>
-              </a:rPr>
-              <a:t> con las cuatro fichas y el párrafo puente.</a:t>
-            </a:r>
-          </a:p>
-          <a:p>
-            <a:pPr lvl="1">
-              <a:spcAft>
-                <a:spcPts val="600"/>
-              </a:spcAft>
-            </a:pPr>
-            <a:r>
-              <a:rPr sz="1500" b="0" i="0">
-                <a:solidFill>
-                  <a:srgbClr val="2B2B2B"/>
-                </a:solidFill>
-                <a:latin typeface="Calibri"/>
-              </a:rPr>
-              <a:t>●   [URL CDigital — campus del curso pendiente]</a:t>
+              <a:t>–   Hay cuatro fichas, con al menos una fuente nacional o local y una internacional.</a:t>
             </a:r>
           </a:p>
           <a:p>
@@ -6102,25 +6272,7 @@
                 </a:solidFill>
                 <a:latin typeface="Calibri"/>
               </a:rPr>
-              <a:t>–   </a:t>
-            </a:r>
-            <a:r>
-              <a:rPr sz="1600" b="1" i="0">
-                <a:solidFill>
-                  <a:srgbClr val="2B2B2B"/>
-                </a:solidFill>
-                <a:latin typeface="Calibri"/>
-              </a:rPr>
-              <a:t>Autónomo 1:</a:t>
-            </a:r>
-            <a:r>
-              <a:rPr sz="1600" b="0" i="0">
-                <a:solidFill>
-                  <a:srgbClr val="2B2B2B"/>
-                </a:solidFill>
-                <a:latin typeface="Calibri"/>
-              </a:rPr>
-              <a:t> aplique la técnica de bola de nieve: entre a las referencias de su mejor artículo y sume dos fuentes más.</a:t>
+              <a:t>–   Ninguna ficha contiene texto copiado del resumen original.</a:t>
             </a:r>
           </a:p>
           <a:p>
@@ -6136,25 +6288,7 @@
                 </a:solidFill>
                 <a:latin typeface="Calibri"/>
               </a:rPr>
-              <a:t>–   </a:t>
-            </a:r>
-            <a:r>
-              <a:rPr sz="1600" b="1" i="0">
-                <a:solidFill>
-                  <a:srgbClr val="2B2B2B"/>
-                </a:solidFill>
-                <a:latin typeface="Calibri"/>
-              </a:rPr>
-              <a:t>Autónomo 2:</a:t>
-            </a:r>
-            <a:r>
-              <a:rPr sz="1600" b="0" i="0">
-                <a:solidFill>
-                  <a:srgbClr val="2B2B2B"/>
-                </a:solidFill>
-                <a:latin typeface="Calibri"/>
-              </a:rPr>
-              <a:t> pegue las fichas en la sección de marco referencial del documento que armó con la plantilla.</a:t>
+              <a:t>–   Las cinco casillas están llenas en las cuatro fichas, incluida "me aporta…".</a:t>
             </a:r>
           </a:p>
           <a:p>
@@ -6170,25 +6304,7 @@
                 </a:solidFill>
                 <a:latin typeface="Calibri"/>
               </a:rPr>
-              <a:t>–   </a:t>
-            </a:r>
-            <a:r>
-              <a:rPr sz="1600" b="1" i="0">
-                <a:solidFill>
-                  <a:srgbClr val="2B2B2B"/>
-                </a:solidFill>
-                <a:latin typeface="Calibri"/>
-              </a:rPr>
-              <a:t>Autónomo 3:</a:t>
-            </a:r>
-            <a:r>
-              <a:rPr sz="1600" b="0" i="0">
-                <a:solidFill>
-                  <a:srgbClr val="2B2B2B"/>
-                </a:solidFill>
-                <a:latin typeface="Calibri"/>
-              </a:rPr>
-              <a:t> subraye en sus fichas los tres conceptos que más se repiten; serán la materia prima de la próxima sesión.</a:t>
+              <a:t>–   Cada aporte es específico: dice qué se lleva, no "sirve de referencia".</a:t>
             </a:r>
           </a:p>
           <a:p>
@@ -6204,59 +6320,55 @@
                 </a:solidFill>
                 <a:latin typeface="Calibri"/>
               </a:rPr>
-              <a:t>–   </a:t>
-            </a:r>
-            <a:r>
-              <a:rPr sz="1600" b="1" i="0">
-                <a:solidFill>
-                  <a:srgbClr val="2B2B2B"/>
-                </a:solidFill>
-                <a:latin typeface="Calibri"/>
-              </a:rPr>
-              <a:t>Próxima sesión:</a:t>
-            </a:r>
-            <a:r>
-              <a:rPr sz="1600" b="0" i="0">
-                <a:solidFill>
-                  <a:srgbClr val="2B2B2B"/>
-                </a:solidFill>
-                <a:latin typeface="Calibri"/>
-              </a:rPr>
-              <a:t> se pasa de los estudios previos a la </a:t>
-            </a:r>
-            <a:r>
-              <a:rPr sz="1600" b="1" i="0">
-                <a:solidFill>
-                  <a:srgbClr val="2B2B2B"/>
-                </a:solidFill>
-                <a:latin typeface="Calibri"/>
-              </a:rPr>
-              <a:t>teoría de fondo</a:t>
-            </a:r>
-            <a:r>
-              <a:rPr sz="1600" b="0" i="0">
-                <a:solidFill>
-                  <a:srgbClr val="2B2B2B"/>
-                </a:solidFill>
-                <a:latin typeface="Calibri"/>
-              </a:rPr>
-              <a:t>: el marco teórico organizado por constructos.</a:t>
-            </a:r>
-          </a:p>
-          <a:p>
-            <a:pPr lvl="1">
+              <a:t>–   Todas las fuentes son estudios con método verificable (nada de blogs ni páginas comerciales).</a:t>
+            </a:r>
+          </a:p>
+          <a:p>
+            <a:pPr>
               <a:spcAft>
-                <a:spcPts val="600"/>
+                <a:spcPts val="1000"/>
               </a:spcAft>
             </a:pPr>
             <a:r>
-              <a:rPr sz="1500" b="0" i="0">
-                <a:solidFill>
-                  <a:srgbClr val="2B2B2B"/>
-                </a:solidFill>
-                <a:latin typeface="Calibri"/>
-              </a:rPr>
-              <a:t>●   Traiga abiertas su pregunta y estas cuatro fichas: de ahí salen los constructos.</a:t>
+              <a:rPr sz="1600" b="0" i="0">
+                <a:solidFill>
+                  <a:srgbClr val="2B2B2B"/>
+                </a:solidFill>
+                <a:latin typeface="Calibri"/>
+              </a:rPr>
+              <a:t>–   Las cuatro referencias están en APA 7 y revisadas a mano después de ZoteroBib.</a:t>
+            </a:r>
+          </a:p>
+          <a:p>
+            <a:pPr>
+              <a:spcAft>
+                <a:spcPts val="1000"/>
+              </a:spcAft>
+            </a:pPr>
+            <a:r>
+              <a:rPr sz="1600" b="0" i="0">
+                <a:solidFill>
+                  <a:srgbClr val="2B2B2B"/>
+                </a:solidFill>
+                <a:latin typeface="Calibri"/>
+              </a:rPr>
+              <a:t>–   El párrafo puente tiene los tres movimientos y termina nombrando el vacío.</a:t>
+            </a:r>
+          </a:p>
+          <a:p>
+            <a:pPr>
+              <a:spcAft>
+                <a:spcPts val="1000"/>
+              </a:spcAft>
+            </a:pPr>
+            <a:r>
+              <a:rPr sz="1600" b="0" i="0">
+                <a:solidFill>
+                  <a:srgbClr val="2B2B2B"/>
+                </a:solidFill>
+                <a:latin typeface="Calibri"/>
+              </a:rPr>
+              <a:t>–   El archivo se llama `S04_Antecedentes_Apellido`.</a:t>
             </a:r>
           </a:p>
         </p:txBody>
@@ -6305,6 +6417,1615 @@
 </file>
 
 <file path=ppt/slides/slide17.xml><?xml version="1.0" encoding="utf-8"?>
+<p:sld xmlns:a="http://schemas.openxmlformats.org/drawingml/2006/main" xmlns:p="http://schemas.openxmlformats.org/presentationml/2006/main" xmlns:r="http://schemas.openxmlformats.org/officeDocument/2006/relationships">
+  <p:cSld>
+    <p:bg>
+      <p:bgPr>
+        <a:solidFill>
+          <a:srgbClr val="FFFFFF"/>
+        </a:solidFill>
+        <a:effectLst/>
+      </p:bgPr>
+    </p:bg>
+    <p:spTree>
+      <p:nvGrpSpPr>
+        <p:cNvPr id="1" name=""/>
+        <p:cNvGrpSpPr/>
+        <p:nvPr/>
+      </p:nvGrpSpPr>
+      <p:grpSpPr/>
+      <p:sp>
+        <p:nvSpPr>
+          <p:cNvPr id="2" name="Rectangle 1"/>
+          <p:cNvSpPr/>
+          <p:nvPr/>
+        </p:nvSpPr>
+        <p:spPr>
+          <a:xfrm>
+            <a:off x="0" y="0"/>
+            <a:ext cx="12191695" cy="1188720"/>
+          </a:xfrm>
+          <a:prstGeom prst="rect">
+            <a:avLst/>
+          </a:prstGeom>
+          <a:solidFill>
+            <a:srgbClr val="0C2340"/>
+          </a:solidFill>
+          <a:ln>
+            <a:noFill/>
+          </a:ln>
+          <a:effectLst/>
+        </p:spPr>
+        <p:style>
+          <a:lnRef idx="1">
+            <a:schemeClr val="accent1"/>
+          </a:lnRef>
+          <a:fillRef idx="3">
+            <a:schemeClr val="accent1"/>
+          </a:fillRef>
+          <a:effectRef idx="2">
+            <a:schemeClr val="accent1"/>
+          </a:effectRef>
+          <a:fontRef idx="minor">
+            <a:schemeClr val="lt1"/>
+          </a:fontRef>
+        </p:style>
+        <p:txBody>
+          <a:bodyPr rtlCol="0" anchor="ctr"/>
+          <a:lstStyle/>
+          <a:p>
+            <a:pPr algn="ctr"/>
+          </a:p>
+        </p:txBody>
+      </p:sp>
+      <p:sp>
+        <p:nvSpPr>
+          <p:cNvPr id="3" name="TextBox 2"/>
+          <p:cNvSpPr txBox="1"/>
+          <p:nvPr/>
+        </p:nvSpPr>
+        <p:spPr>
+          <a:xfrm>
+            <a:off x="640080" y="0"/>
+            <a:ext cx="9082735" cy="1188720"/>
+          </a:xfrm>
+          <a:prstGeom prst="rect">
+            <a:avLst/>
+          </a:prstGeom>
+          <a:noFill/>
+        </p:spPr>
+        <p:txBody>
+          <a:bodyPr wrap="square" anchor="ctr" lIns="0" rIns="0" tIns="0" bIns="0">
+            <a:spAutoFit/>
+          </a:bodyPr>
+          <a:lstStyle/>
+          <a:p>
+            <a:pPr algn="ctr"/>
+            <a:r>
+              <a:rPr sz="2600" b="1" i="0">
+                <a:solidFill>
+                  <a:srgbClr val="FFFFFF"/>
+                </a:solidFill>
+                <a:latin typeface="Calibri"/>
+              </a:rPr>
+              <a:t>Trabajo autónomo y qué viene la próxima sesión</a:t>
+            </a:r>
+          </a:p>
+        </p:txBody>
+      </p:sp>
+      <p:sp>
+        <p:nvSpPr>
+          <p:cNvPr id="4" name="TextBox 3"/>
+          <p:cNvSpPr txBox="1"/>
+          <p:nvPr/>
+        </p:nvSpPr>
+        <p:spPr>
+          <a:xfrm>
+            <a:off x="640080" y="1691639"/>
+            <a:ext cx="10911535" cy="4617720"/>
+          </a:xfrm>
+          <a:prstGeom prst="rect">
+            <a:avLst/>
+          </a:prstGeom>
+          <a:noFill/>
+        </p:spPr>
+        <p:txBody>
+          <a:bodyPr wrap="square" anchor="t" lIns="0" rIns="0" tIns="0" bIns="0">
+            <a:spAutoFit/>
+          </a:bodyPr>
+          <a:lstStyle/>
+          <a:p>
+            <a:pPr>
+              <a:spcAft>
+                <a:spcPts val="1000"/>
+              </a:spcAft>
+            </a:pPr>
+            <a:r>
+              <a:rPr sz="1600" b="0" i="0">
+                <a:solidFill>
+                  <a:srgbClr val="2B2B2B"/>
+                </a:solidFill>
+                <a:latin typeface="Calibri"/>
+              </a:rPr>
+              <a:t>–   </a:t>
+            </a:r>
+            <a:r>
+              <a:rPr sz="1600" b="1" i="0">
+                <a:solidFill>
+                  <a:srgbClr val="2B2B2B"/>
+                </a:solidFill>
+                <a:latin typeface="Calibri"/>
+              </a:rPr>
+              <a:t>Entrega:</a:t>
+            </a:r>
+            <a:r>
+              <a:rPr sz="1600" b="0" i="0">
+                <a:solidFill>
+                  <a:srgbClr val="2B2B2B"/>
+                </a:solidFill>
+                <a:latin typeface="Calibri"/>
+              </a:rPr>
+              <a:t> suba `S04_Antecedentes_Apellido` a </a:t>
+            </a:r>
+            <a:r>
+              <a:rPr sz="1600" b="1" i="0">
+                <a:solidFill>
+                  <a:srgbClr val="2B2B2B"/>
+                </a:solidFill>
+                <a:latin typeface="Calibri"/>
+              </a:rPr>
+              <a:t>CDigital</a:t>
+            </a:r>
+            <a:r>
+              <a:rPr sz="1600" b="0" i="0">
+                <a:solidFill>
+                  <a:srgbClr val="2B2B2B"/>
+                </a:solidFill>
+                <a:latin typeface="Calibri"/>
+              </a:rPr>
+              <a:t> con las cuatro fichas y el párrafo puente.</a:t>
+            </a:r>
+          </a:p>
+          <a:p>
+            <a:pPr lvl="1">
+              <a:spcAft>
+                <a:spcPts val="600"/>
+              </a:spcAft>
+            </a:pPr>
+            <a:r>
+              <a:rPr sz="1500" b="0" i="0">
+                <a:solidFill>
+                  <a:srgbClr val="2B2B2B"/>
+                </a:solidFill>
+                <a:latin typeface="Calibri"/>
+              </a:rPr>
+              <a:t>●   https://cdigital.cun.edu.co/course/view.php?id=129268</a:t>
+            </a:r>
+          </a:p>
+          <a:p>
+            <a:pPr>
+              <a:spcAft>
+                <a:spcPts val="1000"/>
+              </a:spcAft>
+            </a:pPr>
+            <a:r>
+              <a:rPr sz="1600" b="0" i="0">
+                <a:solidFill>
+                  <a:srgbClr val="2B2B2B"/>
+                </a:solidFill>
+                <a:latin typeface="Calibri"/>
+              </a:rPr>
+              <a:t>–   </a:t>
+            </a:r>
+            <a:r>
+              <a:rPr sz="1600" b="1" i="0">
+                <a:solidFill>
+                  <a:srgbClr val="2B2B2B"/>
+                </a:solidFill>
+                <a:latin typeface="Calibri"/>
+              </a:rPr>
+              <a:t>Autónomo 1:</a:t>
+            </a:r>
+            <a:r>
+              <a:rPr sz="1600" b="0" i="0">
+                <a:solidFill>
+                  <a:srgbClr val="2B2B2B"/>
+                </a:solidFill>
+                <a:latin typeface="Calibri"/>
+              </a:rPr>
+              <a:t> aplique la técnica de bola de nieve: entre a las referencias de su mejor artículo y sume dos fuentes más.</a:t>
+            </a:r>
+          </a:p>
+          <a:p>
+            <a:pPr>
+              <a:spcAft>
+                <a:spcPts val="1000"/>
+              </a:spcAft>
+            </a:pPr>
+            <a:r>
+              <a:rPr sz="1600" b="0" i="0">
+                <a:solidFill>
+                  <a:srgbClr val="2B2B2B"/>
+                </a:solidFill>
+                <a:latin typeface="Calibri"/>
+              </a:rPr>
+              <a:t>–   </a:t>
+            </a:r>
+            <a:r>
+              <a:rPr sz="1600" b="1" i="0">
+                <a:solidFill>
+                  <a:srgbClr val="2B2B2B"/>
+                </a:solidFill>
+                <a:latin typeface="Calibri"/>
+              </a:rPr>
+              <a:t>Autónomo 2:</a:t>
+            </a:r>
+            <a:r>
+              <a:rPr sz="1600" b="0" i="0">
+                <a:solidFill>
+                  <a:srgbClr val="2B2B2B"/>
+                </a:solidFill>
+                <a:latin typeface="Calibri"/>
+              </a:rPr>
+              <a:t> pegue las fichas en la sección de marco referencial del documento que armó con la plantilla.</a:t>
+            </a:r>
+          </a:p>
+          <a:p>
+            <a:pPr>
+              <a:spcAft>
+                <a:spcPts val="1000"/>
+              </a:spcAft>
+            </a:pPr>
+            <a:r>
+              <a:rPr sz="1600" b="0" i="0">
+                <a:solidFill>
+                  <a:srgbClr val="2B2B2B"/>
+                </a:solidFill>
+                <a:latin typeface="Calibri"/>
+              </a:rPr>
+              <a:t>–   </a:t>
+            </a:r>
+            <a:r>
+              <a:rPr sz="1600" b="1" i="0">
+                <a:solidFill>
+                  <a:srgbClr val="2B2B2B"/>
+                </a:solidFill>
+                <a:latin typeface="Calibri"/>
+              </a:rPr>
+              <a:t>Autónomo 3:</a:t>
+            </a:r>
+            <a:r>
+              <a:rPr sz="1600" b="0" i="0">
+                <a:solidFill>
+                  <a:srgbClr val="2B2B2B"/>
+                </a:solidFill>
+                <a:latin typeface="Calibri"/>
+              </a:rPr>
+              <a:t> subraye en sus fichas los tres conceptos que más se repiten; serán la materia prima de la próxima sesión.</a:t>
+            </a:r>
+          </a:p>
+          <a:p>
+            <a:pPr>
+              <a:spcAft>
+                <a:spcPts val="1000"/>
+              </a:spcAft>
+            </a:pPr>
+            <a:r>
+              <a:rPr sz="1600" b="0" i="0">
+                <a:solidFill>
+                  <a:srgbClr val="2B2B2B"/>
+                </a:solidFill>
+                <a:latin typeface="Calibri"/>
+              </a:rPr>
+              <a:t>–   </a:t>
+            </a:r>
+            <a:r>
+              <a:rPr sz="1600" b="1" i="0">
+                <a:solidFill>
+                  <a:srgbClr val="2B2B2B"/>
+                </a:solidFill>
+                <a:latin typeface="Calibri"/>
+              </a:rPr>
+              <a:t>Próxima sesión:</a:t>
+            </a:r>
+            <a:r>
+              <a:rPr sz="1600" b="0" i="0">
+                <a:solidFill>
+                  <a:srgbClr val="2B2B2B"/>
+                </a:solidFill>
+                <a:latin typeface="Calibri"/>
+              </a:rPr>
+              <a:t> se pasa de los estudios previos a la </a:t>
+            </a:r>
+            <a:r>
+              <a:rPr sz="1600" b="1" i="0">
+                <a:solidFill>
+                  <a:srgbClr val="2B2B2B"/>
+                </a:solidFill>
+                <a:latin typeface="Calibri"/>
+              </a:rPr>
+              <a:t>teoría de fondo</a:t>
+            </a:r>
+            <a:r>
+              <a:rPr sz="1600" b="0" i="0">
+                <a:solidFill>
+                  <a:srgbClr val="2B2B2B"/>
+                </a:solidFill>
+                <a:latin typeface="Calibri"/>
+              </a:rPr>
+              <a:t>: el marco teórico organizado por constructos.</a:t>
+            </a:r>
+          </a:p>
+          <a:p>
+            <a:pPr lvl="1">
+              <a:spcAft>
+                <a:spcPts val="600"/>
+              </a:spcAft>
+            </a:pPr>
+            <a:r>
+              <a:rPr sz="1500" b="0" i="0">
+                <a:solidFill>
+                  <a:srgbClr val="2B2B2B"/>
+                </a:solidFill>
+                <a:latin typeface="Calibri"/>
+              </a:rPr>
+              <a:t>●   Traiga abiertas su pregunta y estas cuatro fichas: de ahí salen los constructos.</a:t>
+            </a:r>
+          </a:p>
+        </p:txBody>
+      </p:sp>
+      <p:sp>
+        <p:nvSpPr>
+          <p:cNvPr id="5" name="TextBox 4"/>
+          <p:cNvSpPr txBox="1"/>
+          <p:nvPr/>
+        </p:nvSpPr>
+        <p:spPr>
+          <a:xfrm>
+            <a:off x="11094415" y="6446520"/>
+            <a:ext cx="548640" cy="274320"/>
+          </a:xfrm>
+          <a:prstGeom prst="rect">
+            <a:avLst/>
+          </a:prstGeom>
+          <a:noFill/>
+        </p:spPr>
+        <p:txBody>
+          <a:bodyPr wrap="square" anchor="t" lIns="0" rIns="0" tIns="0" bIns="0">
+            <a:spAutoFit/>
+          </a:bodyPr>
+          <a:lstStyle/>
+          <a:p>
+            <a:pPr algn="r"/>
+            <a:r>
+              <a:rPr sz="1000" b="1" i="0">
+                <a:solidFill>
+                  <a:srgbClr val="8F989D"/>
+                </a:solidFill>
+                <a:latin typeface="Calibri"/>
+              </a:rPr>
+              <a:t>17</a:t>
+            </a:r>
+          </a:p>
+        </p:txBody>
+      </p:sp>
+    </p:spTree>
+  </p:cSld>
+  <p:clrMapOvr>
+    <a:masterClrMapping/>
+  </p:clrMapOvr>
+</p:sld>
+</file>
+
+<file path=ppt/slides/slide18.xml><?xml version="1.0" encoding="utf-8"?>
+<p:sld xmlns:a="http://schemas.openxmlformats.org/drawingml/2006/main" xmlns:p="http://schemas.openxmlformats.org/presentationml/2006/main" xmlns:r="http://schemas.openxmlformats.org/officeDocument/2006/relationships">
+  <p:cSld>
+    <p:bg>
+      <p:bgPr>
+        <a:solidFill>
+          <a:srgbClr val="FFFFFF"/>
+        </a:solidFill>
+        <a:effectLst/>
+      </p:bgPr>
+    </p:bg>
+    <p:spTree>
+      <p:nvGrpSpPr>
+        <p:cNvPr id="1" name=""/>
+        <p:cNvGrpSpPr/>
+        <p:nvPr/>
+      </p:nvGrpSpPr>
+      <p:grpSpPr/>
+      <p:sp>
+        <p:nvSpPr>
+          <p:cNvPr id="2" name="Rectangle 1"/>
+          <p:cNvSpPr/>
+          <p:nvPr/>
+        </p:nvSpPr>
+        <p:spPr>
+          <a:xfrm>
+            <a:off x="0" y="0"/>
+            <a:ext cx="12191695" cy="1188720"/>
+          </a:xfrm>
+          <a:prstGeom prst="rect">
+            <a:avLst/>
+          </a:prstGeom>
+          <a:solidFill>
+            <a:srgbClr val="0C2340"/>
+          </a:solidFill>
+          <a:ln>
+            <a:noFill/>
+          </a:ln>
+          <a:effectLst/>
+        </p:spPr>
+        <p:style>
+          <a:lnRef idx="1">
+            <a:schemeClr val="accent1"/>
+          </a:lnRef>
+          <a:fillRef idx="3">
+            <a:schemeClr val="accent1"/>
+          </a:fillRef>
+          <a:effectRef idx="2">
+            <a:schemeClr val="accent1"/>
+          </a:effectRef>
+          <a:fontRef idx="minor">
+            <a:schemeClr val="lt1"/>
+          </a:fontRef>
+        </p:style>
+        <p:txBody>
+          <a:bodyPr rtlCol="0" anchor="ctr"/>
+          <a:lstStyle/>
+          <a:p>
+            <a:pPr algn="ctr"/>
+          </a:p>
+        </p:txBody>
+      </p:sp>
+      <p:sp>
+        <p:nvSpPr>
+          <p:cNvPr id="3" name="TextBox 2"/>
+          <p:cNvSpPr txBox="1"/>
+          <p:nvPr/>
+        </p:nvSpPr>
+        <p:spPr>
+          <a:xfrm>
+            <a:off x="640080" y="0"/>
+            <a:ext cx="9082735" cy="1188720"/>
+          </a:xfrm>
+          <a:prstGeom prst="rect">
+            <a:avLst/>
+          </a:prstGeom>
+          <a:noFill/>
+        </p:spPr>
+        <p:txBody>
+          <a:bodyPr wrap="square" anchor="ctr" lIns="0" rIns="0" tIns="0" bIns="0">
+            <a:spAutoFit/>
+          </a:bodyPr>
+          <a:lstStyle/>
+          <a:p>
+            <a:pPr algn="ctr"/>
+            <a:r>
+              <a:rPr sz="2600" b="1" i="0">
+                <a:solidFill>
+                  <a:srgbClr val="FFFFFF"/>
+                </a:solidFill>
+                <a:latin typeface="Calibri"/>
+              </a:rPr>
+              <a:t>RUTA DE ENTREGABLES DEL CURSO</a:t>
+            </a:r>
+          </a:p>
+        </p:txBody>
+      </p:sp>
+      <p:sp>
+        <p:nvSpPr>
+          <p:cNvPr id="4" name="TextBox 3"/>
+          <p:cNvSpPr txBox="1"/>
+          <p:nvPr/>
+        </p:nvSpPr>
+        <p:spPr>
+          <a:xfrm>
+            <a:off x="640080" y="1280160"/>
+            <a:ext cx="10911535" cy="411480"/>
+          </a:xfrm>
+          <a:prstGeom prst="rect">
+            <a:avLst/>
+          </a:prstGeom>
+          <a:noFill/>
+        </p:spPr>
+        <p:txBody>
+          <a:bodyPr wrap="square" anchor="t" lIns="0" rIns="0" tIns="0" bIns="0">
+            <a:spAutoFit/>
+          </a:bodyPr>
+          <a:lstStyle/>
+          <a:p>
+            <a:pPr algn="ctr"/>
+            <a:r>
+              <a:rPr sz="1500" b="0" i="0">
+                <a:solidFill>
+                  <a:srgbClr val="2B2B2B"/>
+                </a:solidFill>
+                <a:latin typeface="Calibri"/>
+              </a:rPr>
+              <a:t>Sin fechas a propósito: aquí va </a:t>
+            </a:r>
+            <a:r>
+              <a:rPr sz="1500" b="1" i="0">
+                <a:solidFill>
+                  <a:srgbClr val="2B2B2B"/>
+                </a:solidFill>
+                <a:latin typeface="Calibri"/>
+              </a:rPr>
+              <a:t>en qué punto del curso</a:t>
+            </a:r>
+            <a:r>
+              <a:rPr sz="1500" b="0" i="0">
+                <a:solidFill>
+                  <a:srgbClr val="2B2B2B"/>
+                </a:solidFill>
+                <a:latin typeface="Calibri"/>
+              </a:rPr>
+              <a:t> cierra cada ítem · la ventana exacta la fija CDigital</a:t>
+            </a:r>
+          </a:p>
+        </p:txBody>
+      </p:sp>
+      <p:graphicFrame>
+        <p:nvGraphicFramePr>
+          <p:cNvPr id="5" name="Table 4"/>
+          <p:cNvGraphicFramePr>
+            <a:graphicFrameLocks noGrp="1"/>
+          </p:cNvGraphicFramePr>
+          <p:nvPr/>
+        </p:nvGraphicFramePr>
+        <p:xfrm>
+          <a:off x="640080" y="2011679"/>
+          <a:ext cx="10911533" cy="4297680"/>
+        </p:xfrm>
+        <a:graphic>
+          <a:graphicData uri="http://schemas.openxmlformats.org/drawingml/2006/table">
+            <a:tbl>
+              <a:tblPr>
+                <a:tableStyleId>{2D5ABB26-0587-4C30-8999-92F81FD0307C}</a:tableStyleId>
+              </a:tblPr>
+              <a:tblGrid>
+                <a:gridCol w="2659113"/>
+                <a:gridCol w="2659113"/>
+                <a:gridCol w="5593307"/>
+              </a:tblGrid>
+              <a:tr h="477520">
+                <a:tc>
+                  <a:txBody>
+                    <a:bodyPr/>
+                    <a:lstStyle/>
+                    <a:p>
+                      <a:pPr algn="l"/>
+                      <a:r>
+                        <a:rPr sz="1300" b="1" i="0">
+                          <a:solidFill>
+                            <a:srgbClr val="FFFFFF"/>
+                          </a:solidFill>
+                          <a:latin typeface="Calibri"/>
+                        </a:rPr>
+                        <a:t>Cierra en la semana de…</a:t>
+                      </a:r>
+                    </a:p>
+                  </a:txBody>
+                  <a:tcPr anchor="ctr" marL="109728" marR="91440" marT="36576" marB="36576">
+                    <a:solidFill>
+                      <a:srgbClr val="0C2340"/>
+                    </a:solidFill>
+                  </a:tcPr>
+                </a:tc>
+                <a:tc>
+                  <a:txBody>
+                    <a:bodyPr/>
+                    <a:lstStyle/>
+                    <a:p>
+                      <a:pPr algn="l"/>
+                      <a:r>
+                        <a:rPr sz="1300" b="1" i="0">
+                          <a:solidFill>
+                            <a:srgbClr val="FFFFFF"/>
+                          </a:solidFill>
+                          <a:latin typeface="Calibri"/>
+                        </a:rPr>
+                        <a:t>Entregable</a:t>
+                      </a:r>
+                    </a:p>
+                  </a:txBody>
+                  <a:tcPr anchor="ctr" marL="109728" marR="91440" marT="36576" marB="36576">
+                    <a:solidFill>
+                      <a:srgbClr val="0C2340"/>
+                    </a:solidFill>
+                  </a:tcPr>
+                </a:tc>
+                <a:tc>
+                  <a:txBody>
+                    <a:bodyPr/>
+                    <a:lstStyle/>
+                    <a:p>
+                      <a:pPr algn="l"/>
+                      <a:r>
+                        <a:rPr sz="1300" b="1" i="0">
+                          <a:solidFill>
+                            <a:srgbClr val="FFFFFF"/>
+                          </a:solidFill>
+                          <a:latin typeface="Calibri"/>
+                        </a:rPr>
+                        <a:t>Qué debes tener listo</a:t>
+                      </a:r>
+                    </a:p>
+                  </a:txBody>
+                  <a:tcPr anchor="ctr" marL="109728" marR="91440" marT="36576" marB="36576">
+                    <a:solidFill>
+                      <a:srgbClr val="0C2340"/>
+                    </a:solidFill>
+                  </a:tcPr>
+                </a:tc>
+              </a:tr>
+              <a:tr h="477520">
+                <a:tc>
+                  <a:txBody>
+                    <a:bodyPr/>
+                    <a:lstStyle/>
+                    <a:p>
+                      <a:pPr algn="l"/>
+                      <a:r>
+                        <a:rPr sz="1100" b="1" i="0">
+                          <a:solidFill>
+                            <a:srgbClr val="2B2B2B"/>
+                          </a:solidFill>
+                          <a:latin typeface="Calibri"/>
+                        </a:rPr>
+                        <a:t>Sesión 03</a:t>
+                      </a:r>
+                      <a:r>
+                        <a:rPr sz="1100" b="0" i="0">
+                          <a:solidFill>
+                            <a:srgbClr val="2B2B2B"/>
+                          </a:solidFill>
+                          <a:latin typeface="Calibri"/>
+                        </a:rPr>
+                        <a:t> · ya cerró</a:t>
+                      </a:r>
+                    </a:p>
+                  </a:txBody>
+                  <a:tcPr anchor="ctr" marL="109728" marR="91440" marT="36576" marB="36576">
+                    <a:solidFill>
+                      <a:srgbClr val="FFFFFF"/>
+                    </a:solidFill>
+                  </a:tcPr>
+                </a:tc>
+                <a:tc>
+                  <a:txBody>
+                    <a:bodyPr/>
+                    <a:lstStyle/>
+                    <a:p>
+                      <a:pPr algn="l"/>
+                      <a:r>
+                        <a:rPr sz="1100" b="1" i="0">
+                          <a:solidFill>
+                            <a:srgbClr val="2B2B2B"/>
+                          </a:solidFill>
+                          <a:latin typeface="Calibri"/>
+                        </a:rPr>
+                        <a:t>Quiz 1</a:t>
+                      </a:r>
+                      <a:r>
+                        <a:rPr sz="1100" b="0" i="0">
+                          <a:solidFill>
+                            <a:srgbClr val="2B2B2B"/>
+                          </a:solidFill>
+                          <a:latin typeface="Calibri"/>
+                        </a:rPr>
+                        <a:t> · Cuestionario · 6%</a:t>
+                      </a:r>
+                    </a:p>
+                  </a:txBody>
+                  <a:tcPr anchor="ctr" marL="109728" marR="91440" marT="36576" marB="36576">
+                    <a:solidFill>
+                      <a:srgbClr val="FFFFFF"/>
+                    </a:solidFill>
+                  </a:tcPr>
+                </a:tc>
+                <a:tc>
+                  <a:txBody>
+                    <a:bodyPr/>
+                    <a:lstStyle/>
+                    <a:p>
+                      <a:pPr algn="l"/>
+                      <a:r>
+                        <a:rPr sz="1100" b="0" i="0">
+                          <a:solidFill>
+                            <a:srgbClr val="2B2B2B"/>
+                          </a:solidFill>
+                          <a:latin typeface="Calibri"/>
+                        </a:rPr>
+                        <a:t>Ten formulados </a:t>
+                      </a:r>
+                      <a:r>
+                        <a:rPr sz="1100" b="1" i="0">
+                          <a:solidFill>
+                            <a:srgbClr val="2B2B2B"/>
+                          </a:solidFill>
+                          <a:latin typeface="Calibri"/>
+                        </a:rPr>
+                        <a:t>pregunta, objetivos y título</a:t>
+                      </a:r>
+                      <a:r>
+                        <a:rPr sz="1100" b="0" i="0">
+                          <a:solidFill>
+                            <a:srgbClr val="2B2B2B"/>
+                          </a:solidFill>
+                          <a:latin typeface="Calibri"/>
+                        </a:rPr>
+                        <a:t> provisional.</a:t>
+                      </a:r>
+                    </a:p>
+                  </a:txBody>
+                  <a:tcPr anchor="ctr" marL="109728" marR="91440" marT="36576" marB="36576">
+                    <a:solidFill>
+                      <a:srgbClr val="FFFFFF"/>
+                    </a:solidFill>
+                  </a:tcPr>
+                </a:tc>
+              </a:tr>
+              <a:tr h="477520">
+                <a:tc>
+                  <a:txBody>
+                    <a:bodyPr/>
+                    <a:lstStyle/>
+                    <a:p>
+                      <a:pPr algn="l"/>
+                      <a:r>
+                        <a:rPr sz="1100" b="1" i="0">
+                          <a:solidFill>
+                            <a:srgbClr val="2B2B2B"/>
+                          </a:solidFill>
+                          <a:latin typeface="Calibri"/>
+                        </a:rPr>
+                        <a:t>Sesión 05</a:t>
+                      </a:r>
+                      <a:r>
+                        <a:rPr sz="1100" b="0" i="0">
+                          <a:solidFill>
+                            <a:srgbClr val="2B2B2B"/>
+                          </a:solidFill>
+                          <a:latin typeface="Calibri"/>
+                        </a:rPr>
+                        <a:t> · pendiente</a:t>
+                      </a:r>
+                    </a:p>
+                  </a:txBody>
+                  <a:tcPr anchor="ctr" marL="109728" marR="91440" marT="36576" marB="36576">
+                    <a:solidFill>
+                      <a:srgbClr val="F2F2F2"/>
+                    </a:solidFill>
+                  </a:tcPr>
+                </a:tc>
+                <a:tc>
+                  <a:txBody>
+                    <a:bodyPr/>
+                    <a:lstStyle/>
+                    <a:p>
+                      <a:pPr algn="l"/>
+                      <a:r>
+                        <a:rPr sz="1100" b="1" i="0">
+                          <a:solidFill>
+                            <a:srgbClr val="2B2B2B"/>
+                          </a:solidFill>
+                          <a:latin typeface="Calibri"/>
+                        </a:rPr>
+                        <a:t>Parcial 1</a:t>
+                      </a:r>
+                      <a:r>
+                        <a:rPr sz="1100" b="0" i="0">
+                          <a:solidFill>
+                            <a:srgbClr val="2B2B2B"/>
+                          </a:solidFill>
+                          <a:latin typeface="Calibri"/>
+                        </a:rPr>
+                        <a:t> · Cuestionario · 24%</a:t>
+                      </a:r>
+                    </a:p>
+                  </a:txBody>
+                  <a:tcPr anchor="ctr" marL="109728" marR="91440" marT="36576" marB="36576">
+                    <a:solidFill>
+                      <a:srgbClr val="F2F2F2"/>
+                    </a:solidFill>
+                  </a:tcPr>
+                </a:tc>
+                <a:tc>
+                  <a:txBody>
+                    <a:bodyPr/>
+                    <a:lstStyle/>
+                    <a:p>
+                      <a:pPr algn="l"/>
+                      <a:r>
+                        <a:rPr sz="1100" b="0" i="0">
+                          <a:solidFill>
+                            <a:srgbClr val="2B2B2B"/>
+                          </a:solidFill>
+                          <a:latin typeface="Calibri"/>
+                        </a:rPr>
+                        <a:t>Repasa </a:t>
+                      </a:r>
+                      <a:r>
+                        <a:rPr sz="1100" b="1" i="0">
+                          <a:solidFill>
+                            <a:srgbClr val="2B2B2B"/>
+                          </a:solidFill>
+                          <a:latin typeface="Calibri"/>
+                        </a:rPr>
+                        <a:t>estructura APA CUN</a:t>
+                      </a:r>
+                      <a:r>
+                        <a:rPr sz="1100" b="0" i="0">
+                          <a:solidFill>
+                            <a:srgbClr val="2B2B2B"/>
+                          </a:solidFill>
+                          <a:latin typeface="Calibri"/>
+                        </a:rPr>
+                        <a:t> y antecedentes Fase I, más pregunta, objetivos y título.</a:t>
+                      </a:r>
+                    </a:p>
+                  </a:txBody>
+                  <a:tcPr anchor="ctr" marL="109728" marR="91440" marT="36576" marB="36576">
+                    <a:solidFill>
+                      <a:srgbClr val="F2F2F2"/>
+                    </a:solidFill>
+                  </a:tcPr>
+                </a:tc>
+              </a:tr>
+              <a:tr h="477520">
+                <a:tc>
+                  <a:txBody>
+                    <a:bodyPr/>
+                    <a:lstStyle/>
+                    <a:p>
+                      <a:pPr algn="l"/>
+                      <a:r>
+                        <a:rPr sz="1100" b="1" i="0">
+                          <a:solidFill>
+                            <a:srgbClr val="2B2B2B"/>
+                          </a:solidFill>
+                          <a:latin typeface="Calibri"/>
+                        </a:rPr>
+                        <a:t>Sesión 07</a:t>
+                      </a:r>
+                      <a:r>
+                        <a:rPr sz="1100" b="0" i="0">
+                          <a:solidFill>
+                            <a:srgbClr val="2B2B2B"/>
+                          </a:solidFill>
+                          <a:latin typeface="Calibri"/>
+                        </a:rPr>
+                        <a:t> · pendiente</a:t>
+                      </a:r>
+                    </a:p>
+                  </a:txBody>
+                  <a:tcPr anchor="ctr" marL="109728" marR="91440" marT="36576" marB="36576">
+                    <a:solidFill>
+                      <a:srgbClr val="FFFFFF"/>
+                    </a:solidFill>
+                  </a:tcPr>
+                </a:tc>
+                <a:tc>
+                  <a:txBody>
+                    <a:bodyPr/>
+                    <a:lstStyle/>
+                    <a:p>
+                      <a:pPr algn="l"/>
+                      <a:r>
+                        <a:rPr sz="1100" b="1" i="0">
+                          <a:solidFill>
+                            <a:srgbClr val="2B2B2B"/>
+                          </a:solidFill>
+                          <a:latin typeface="Calibri"/>
+                        </a:rPr>
+                        <a:t>Quiz 2</a:t>
+                      </a:r>
+                      <a:r>
+                        <a:rPr sz="1100" b="0" i="0">
+                          <a:solidFill>
+                            <a:srgbClr val="2B2B2B"/>
+                          </a:solidFill>
+                          <a:latin typeface="Calibri"/>
+                        </a:rPr>
+                        <a:t> · Cuestionario · 9%</a:t>
+                      </a:r>
+                    </a:p>
+                  </a:txBody>
+                  <a:tcPr anchor="ctr" marL="109728" marR="91440" marT="36576" marB="36576">
+                    <a:solidFill>
+                      <a:srgbClr val="FFFFFF"/>
+                    </a:solidFill>
+                  </a:tcPr>
+                </a:tc>
+                <a:tc>
+                  <a:txBody>
+                    <a:bodyPr/>
+                    <a:lstStyle/>
+                    <a:p>
+                      <a:pPr algn="l"/>
+                      <a:r>
+                        <a:rPr sz="1100" b="0" i="0">
+                          <a:solidFill>
+                            <a:srgbClr val="2B2B2B"/>
+                          </a:solidFill>
+                          <a:latin typeface="Calibri"/>
+                        </a:rPr>
+                        <a:t>Distingue </a:t>
+                      </a:r>
+                      <a:r>
+                        <a:rPr sz="1100" b="1" i="0">
+                          <a:solidFill>
+                            <a:srgbClr val="2B2B2B"/>
+                          </a:solidFill>
+                          <a:latin typeface="Calibri"/>
+                        </a:rPr>
+                        <a:t>marco teórico, conceptual y contextual</a:t>
+                      </a:r>
+                      <a:r>
+                        <a:rPr sz="1100" b="0" i="0">
+                          <a:solidFill>
+                            <a:srgbClr val="2B2B2B"/>
+                          </a:solidFill>
+                          <a:latin typeface="Calibri"/>
+                        </a:rPr>
+                        <a:t> y cómo se articulan con tu pregunta.</a:t>
+                      </a:r>
+                    </a:p>
+                  </a:txBody>
+                  <a:tcPr anchor="ctr" marL="109728" marR="91440" marT="36576" marB="36576">
+                    <a:solidFill>
+                      <a:srgbClr val="FFFFFF"/>
+                    </a:solidFill>
+                  </a:tcPr>
+                </a:tc>
+              </a:tr>
+              <a:tr h="477520">
+                <a:tc>
+                  <a:txBody>
+                    <a:bodyPr/>
+                    <a:lstStyle/>
+                    <a:p>
+                      <a:pPr algn="l"/>
+                      <a:r>
+                        <a:rPr sz="1100" b="1" i="0">
+                          <a:solidFill>
+                            <a:srgbClr val="2B2B2B"/>
+                          </a:solidFill>
+                          <a:latin typeface="Calibri"/>
+                        </a:rPr>
+                        <a:t>Sesión 08</a:t>
+                      </a:r>
+                      <a:r>
+                        <a:rPr sz="1100" b="0" i="0">
+                          <a:solidFill>
+                            <a:srgbClr val="2B2B2B"/>
+                          </a:solidFill>
+                          <a:latin typeface="Calibri"/>
+                        </a:rPr>
+                        <a:t> · pendiente</a:t>
+                      </a:r>
+                    </a:p>
+                  </a:txBody>
+                  <a:tcPr anchor="ctr" marL="109728" marR="91440" marT="36576" marB="36576">
+                    <a:solidFill>
+                      <a:srgbClr val="F2F2F2"/>
+                    </a:solidFill>
+                  </a:tcPr>
+                </a:tc>
+                <a:tc>
+                  <a:txBody>
+                    <a:bodyPr/>
+                    <a:lstStyle/>
+                    <a:p>
+                      <a:pPr algn="l"/>
+                      <a:r>
+                        <a:rPr sz="1100" b="1" i="0">
+                          <a:solidFill>
+                            <a:srgbClr val="2B2B2B"/>
+                          </a:solidFill>
+                          <a:latin typeface="Calibri"/>
+                        </a:rPr>
+                        <a:t>Parcial 2</a:t>
+                      </a:r>
+                      <a:r>
+                        <a:rPr sz="1100" b="0" i="0">
+                          <a:solidFill>
+                            <a:srgbClr val="2B2B2B"/>
+                          </a:solidFill>
+                          <a:latin typeface="Calibri"/>
+                        </a:rPr>
+                        <a:t> · Cuestionario · 21%</a:t>
+                      </a:r>
+                    </a:p>
+                  </a:txBody>
+                  <a:tcPr anchor="ctr" marL="109728" marR="91440" marT="36576" marB="36576">
+                    <a:solidFill>
+                      <a:srgbClr val="F2F2F2"/>
+                    </a:solidFill>
+                  </a:tcPr>
+                </a:tc>
+                <a:tc>
+                  <a:txBody>
+                    <a:bodyPr/>
+                    <a:lstStyle/>
+                    <a:p>
+                      <a:pPr algn="l"/>
+                      <a:r>
+                        <a:rPr sz="1100" b="0" i="0">
+                          <a:solidFill>
+                            <a:srgbClr val="2B2B2B"/>
+                          </a:solidFill>
+                          <a:latin typeface="Calibri"/>
+                        </a:rPr>
+                        <a:t>Repasa los tres marcos y el </a:t>
+                      </a:r>
+                      <a:r>
+                        <a:rPr sz="1100" b="1" i="0">
+                          <a:solidFill>
+                            <a:srgbClr val="2B2B2B"/>
+                          </a:solidFill>
+                          <a:latin typeface="Calibri"/>
+                        </a:rPr>
+                        <a:t>diseño metodológico</a:t>
+                      </a:r>
+                      <a:r>
+                        <a:rPr sz="1100" b="0" i="0">
+                          <a:solidFill>
+                            <a:srgbClr val="2B2B2B"/>
+                          </a:solidFill>
+                          <a:latin typeface="Calibri"/>
+                        </a:rPr>
+                        <a:t>: enfoque, tipo, alcance y diseño.</a:t>
+                      </a:r>
+                    </a:p>
+                  </a:txBody>
+                  <a:tcPr anchor="ctr" marL="109728" marR="91440" marT="36576" marB="36576">
+                    <a:solidFill>
+                      <a:srgbClr val="F2F2F2"/>
+                    </a:solidFill>
+                  </a:tcPr>
+                </a:tc>
+              </a:tr>
+              <a:tr h="477520">
+                <a:tc>
+                  <a:txBody>
+                    <a:bodyPr/>
+                    <a:lstStyle/>
+                    <a:p>
+                      <a:pPr algn="l"/>
+                      <a:r>
+                        <a:rPr sz="1100" b="1" i="0">
+                          <a:solidFill>
+                            <a:srgbClr val="2B2B2B"/>
+                          </a:solidFill>
+                          <a:latin typeface="Calibri"/>
+                        </a:rPr>
+                        <a:t>Sesión 10</a:t>
+                      </a:r>
+                      <a:r>
+                        <a:rPr sz="1100" b="0" i="0">
+                          <a:solidFill>
+                            <a:srgbClr val="2B2B2B"/>
+                          </a:solidFill>
+                          <a:latin typeface="Calibri"/>
+                        </a:rPr>
+                        <a:t> · pendiente</a:t>
+                      </a:r>
+                    </a:p>
+                  </a:txBody>
+                  <a:tcPr anchor="ctr" marL="109728" marR="91440" marT="36576" marB="36576">
+                    <a:solidFill>
+                      <a:srgbClr val="FFFFFF"/>
+                    </a:solidFill>
+                  </a:tcPr>
+                </a:tc>
+                <a:tc>
+                  <a:txBody>
+                    <a:bodyPr/>
+                    <a:lstStyle/>
+                    <a:p>
+                      <a:pPr algn="l"/>
+                      <a:r>
+                        <a:rPr sz="1100" b="1" i="0">
+                          <a:solidFill>
+                            <a:srgbClr val="2B2B2B"/>
+                          </a:solidFill>
+                          <a:latin typeface="Calibri"/>
+                        </a:rPr>
+                        <a:t>Quiz 3</a:t>
+                      </a:r>
+                      <a:r>
+                        <a:rPr sz="1100" b="0" i="0">
+                          <a:solidFill>
+                            <a:srgbClr val="2B2B2B"/>
+                          </a:solidFill>
+                          <a:latin typeface="Calibri"/>
+                        </a:rPr>
+                        <a:t> · Cuestionario · 4%</a:t>
+                      </a:r>
+                    </a:p>
+                  </a:txBody>
+                  <a:tcPr anchor="ctr" marL="109728" marR="91440" marT="36576" marB="36576">
+                    <a:solidFill>
+                      <a:srgbClr val="FFFFFF"/>
+                    </a:solidFill>
+                  </a:tcPr>
+                </a:tc>
+                <a:tc>
+                  <a:txBody>
+                    <a:bodyPr/>
+                    <a:lstStyle/>
+                    <a:p>
+                      <a:pPr algn="l"/>
+                      <a:r>
+                        <a:rPr sz="1100" b="0" i="0">
+                          <a:solidFill>
+                            <a:srgbClr val="2B2B2B"/>
+                          </a:solidFill>
+                          <a:latin typeface="Calibri"/>
+                        </a:rPr>
+                        <a:t>Ten claros </a:t>
+                      </a:r>
+                      <a:r>
+                        <a:rPr sz="1100" b="1" i="0">
+                          <a:solidFill>
+                            <a:srgbClr val="2B2B2B"/>
+                          </a:solidFill>
+                          <a:latin typeface="Calibri"/>
+                        </a:rPr>
+                        <a:t>instrumentos y plan de análisis</a:t>
+                      </a:r>
+                      <a:r>
+                        <a:rPr sz="1100" b="0" i="0">
+                          <a:solidFill>
+                            <a:srgbClr val="2B2B2B"/>
+                          </a:solidFill>
+                          <a:latin typeface="Calibri"/>
+                        </a:rPr>
+                        <a:t> propuestos y la integración del avance.</a:t>
+                      </a:r>
+                    </a:p>
+                  </a:txBody>
+                  <a:tcPr anchor="ctr" marL="109728" marR="91440" marT="36576" marB="36576">
+                    <a:solidFill>
+                      <a:srgbClr val="FFFFFF"/>
+                    </a:solidFill>
+                  </a:tcPr>
+                </a:tc>
+              </a:tr>
+              <a:tr h="477520">
+                <a:tc>
+                  <a:txBody>
+                    <a:bodyPr/>
+                    <a:lstStyle/>
+                    <a:p>
+                      <a:pPr algn="l"/>
+                      <a:r>
+                        <a:rPr sz="1100" b="1" i="0">
+                          <a:solidFill>
+                            <a:srgbClr val="2B2B2B"/>
+                          </a:solidFill>
+                          <a:latin typeface="Calibri"/>
+                        </a:rPr>
+                        <a:t>Sesión 11</a:t>
+                      </a:r>
+                      <a:r>
+                        <a:rPr sz="1100" b="0" i="0">
+                          <a:solidFill>
+                            <a:srgbClr val="2B2B2B"/>
+                          </a:solidFill>
+                          <a:latin typeface="Calibri"/>
+                        </a:rPr>
+                        <a:t> · pendiente</a:t>
+                      </a:r>
+                    </a:p>
+                  </a:txBody>
+                  <a:tcPr anchor="ctr" marL="109728" marR="91440" marT="36576" marB="36576">
+                    <a:solidFill>
+                      <a:srgbClr val="F2F2F2"/>
+                    </a:solidFill>
+                  </a:tcPr>
+                </a:tc>
+                <a:tc>
+                  <a:txBody>
+                    <a:bodyPr/>
+                    <a:lstStyle/>
+                    <a:p>
+                      <a:pPr algn="l"/>
+                      <a:r>
+                        <a:rPr sz="1100" b="1" i="0">
+                          <a:solidFill>
+                            <a:srgbClr val="2B2B2B"/>
+                          </a:solidFill>
+                          <a:latin typeface="Calibri"/>
+                        </a:rPr>
+                        <a:t>ACA Final</a:t>
+                      </a:r>
+                      <a:r>
+                        <a:rPr sz="1100" b="0" i="0">
+                          <a:solidFill>
+                            <a:srgbClr val="2B2B2B"/>
+                          </a:solidFill>
+                          <a:latin typeface="Calibri"/>
+                        </a:rPr>
+                        <a:t> · Tarea · 32,8%</a:t>
+                      </a:r>
+                    </a:p>
+                  </a:txBody>
+                  <a:tcPr anchor="ctr" marL="109728" marR="91440" marT="36576" marB="36576">
+                    <a:solidFill>
+                      <a:srgbClr val="F2F2F2"/>
+                    </a:solidFill>
+                  </a:tcPr>
+                </a:tc>
+                <a:tc>
+                  <a:txBody>
+                    <a:bodyPr/>
+                    <a:lstStyle/>
+                    <a:p>
+                      <a:pPr algn="l"/>
+                      <a:r>
+                        <a:rPr sz="1100" b="0" i="0">
+                          <a:solidFill>
+                            <a:srgbClr val="2B2B2B"/>
+                          </a:solidFill>
+                          <a:latin typeface="Calibri"/>
+                        </a:rPr>
+                        <a:t>Sube el </a:t>
+                      </a:r>
+                      <a:r>
+                        <a:rPr sz="1100" b="1" i="0">
+                          <a:solidFill>
+                            <a:srgbClr val="2B2B2B"/>
+                          </a:solidFill>
+                          <a:latin typeface="Calibri"/>
+                        </a:rPr>
+                        <a:t>avance consolidado</a:t>
+                      </a:r>
+                      <a:r>
+                        <a:rPr sz="1100" b="0" i="0">
+                          <a:solidFill>
+                            <a:srgbClr val="2B2B2B"/>
+                          </a:solidFill>
+                          <a:latin typeface="Calibri"/>
+                        </a:rPr>
+                        <a:t> en plantilla APA CUN, integrado y listo para TG3.</a:t>
+                      </a:r>
+                    </a:p>
+                  </a:txBody>
+                  <a:tcPr anchor="ctr" marL="109728" marR="91440" marT="36576" marB="36576">
+                    <a:solidFill>
+                      <a:srgbClr val="F2F2F2"/>
+                    </a:solidFill>
+                  </a:tcPr>
+                </a:tc>
+              </a:tr>
+              <a:tr h="477520">
+                <a:tc>
+                  <a:txBody>
+                    <a:bodyPr/>
+                    <a:lstStyle/>
+                    <a:p>
+                      <a:pPr algn="l"/>
+                      <a:r>
+                        <a:rPr sz="1100" b="1" i="0">
+                          <a:solidFill>
+                            <a:srgbClr val="2B2B2B"/>
+                          </a:solidFill>
+                          <a:latin typeface="Calibri"/>
+                        </a:rPr>
+                        <a:t>Sesión 11</a:t>
+                      </a:r>
+                      <a:r>
+                        <a:rPr sz="1100" b="0" i="0">
+                          <a:solidFill>
+                            <a:srgbClr val="2B2B2B"/>
+                          </a:solidFill>
+                          <a:latin typeface="Calibri"/>
+                        </a:rPr>
+                        <a:t> · pendiente</a:t>
+                      </a:r>
+                    </a:p>
+                  </a:txBody>
+                  <a:tcPr anchor="ctr" marL="109728" marR="91440" marT="36576" marB="36576">
+                    <a:solidFill>
+                      <a:srgbClr val="FFFFFF"/>
+                    </a:solidFill>
+                  </a:tcPr>
+                </a:tc>
+                <a:tc>
+                  <a:txBody>
+                    <a:bodyPr/>
+                    <a:lstStyle/>
+                    <a:p>
+                      <a:pPr algn="l"/>
+                      <a:r>
+                        <a:rPr sz="1100" b="1" i="0">
+                          <a:solidFill>
+                            <a:srgbClr val="2B2B2B"/>
+                          </a:solidFill>
+                          <a:latin typeface="Calibri"/>
+                        </a:rPr>
+                        <a:t>Autoevaluación</a:t>
+                      </a:r>
+                      <a:r>
+                        <a:rPr sz="1100" b="0" i="0">
+                          <a:solidFill>
+                            <a:srgbClr val="2B2B2B"/>
+                          </a:solidFill>
+                          <a:latin typeface="Calibri"/>
+                        </a:rPr>
+                        <a:t> · Cuestionario · 1,6%</a:t>
+                      </a:r>
+                    </a:p>
+                  </a:txBody>
+                  <a:tcPr anchor="ctr" marL="109728" marR="91440" marT="36576" marB="36576">
+                    <a:solidFill>
+                      <a:srgbClr val="FFFFFF"/>
+                    </a:solidFill>
+                  </a:tcPr>
+                </a:tc>
+                <a:tc>
+                  <a:txBody>
+                    <a:bodyPr/>
+                    <a:lstStyle/>
+                    <a:p>
+                      <a:pPr algn="l"/>
+                      <a:r>
+                        <a:rPr sz="1100" b="0" i="0">
+                          <a:solidFill>
+                            <a:srgbClr val="2B2B2B"/>
+                          </a:solidFill>
+                          <a:latin typeface="Calibri"/>
+                        </a:rPr>
+                        <a:t>Diligénciala tú, de forma </a:t>
+                      </a:r>
+                      <a:r>
+                        <a:rPr sz="1100" b="1" i="0">
+                          <a:solidFill>
+                            <a:srgbClr val="2B2B2B"/>
+                          </a:solidFill>
+                          <a:latin typeface="Calibri"/>
+                        </a:rPr>
+                        <a:t>individual</a:t>
+                      </a:r>
+                      <a:r>
+                        <a:rPr sz="1100" b="0" i="0">
+                          <a:solidFill>
+                            <a:srgbClr val="2B2B2B"/>
+                          </a:solidFill>
+                          <a:latin typeface="Calibri"/>
+                        </a:rPr>
+                        <a:t>, valorando tu participación real.</a:t>
+                      </a:r>
+                    </a:p>
+                  </a:txBody>
+                  <a:tcPr anchor="ctr" marL="109728" marR="91440" marT="36576" marB="36576">
+                    <a:solidFill>
+                      <a:srgbClr val="FFFFFF"/>
+                    </a:solidFill>
+                  </a:tcPr>
+                </a:tc>
+              </a:tr>
+              <a:tr h="477520">
+                <a:tc>
+                  <a:txBody>
+                    <a:bodyPr/>
+                    <a:lstStyle/>
+                    <a:p>
+                      <a:pPr algn="l"/>
+                      <a:r>
+                        <a:rPr sz="1100" b="1" i="0">
+                          <a:solidFill>
+                            <a:srgbClr val="2B2B2B"/>
+                          </a:solidFill>
+                          <a:latin typeface="Calibri"/>
+                        </a:rPr>
+                        <a:t>Sesión 11</a:t>
+                      </a:r>
+                      <a:r>
+                        <a:rPr sz="1100" b="0" i="0">
+                          <a:solidFill>
+                            <a:srgbClr val="2B2B2B"/>
+                          </a:solidFill>
+                          <a:latin typeface="Calibri"/>
+                        </a:rPr>
+                        <a:t> · pendiente</a:t>
+                      </a:r>
+                    </a:p>
+                  </a:txBody>
+                  <a:tcPr anchor="ctr" marL="109728" marR="91440" marT="36576" marB="36576">
+                    <a:solidFill>
+                      <a:srgbClr val="F2F2F2"/>
+                    </a:solidFill>
+                  </a:tcPr>
+                </a:tc>
+                <a:tc>
+                  <a:txBody>
+                    <a:bodyPr/>
+                    <a:lstStyle/>
+                    <a:p>
+                      <a:pPr algn="l"/>
+                      <a:r>
+                        <a:rPr sz="1100" b="1" i="0">
+                          <a:solidFill>
+                            <a:srgbClr val="2B2B2B"/>
+                          </a:solidFill>
+                          <a:latin typeface="Calibri"/>
+                        </a:rPr>
+                        <a:t>Coevaluación</a:t>
+                      </a:r>
+                      <a:r>
+                        <a:rPr sz="1100" b="0" i="0">
+                          <a:solidFill>
+                            <a:srgbClr val="2B2B2B"/>
+                          </a:solidFill>
+                          <a:latin typeface="Calibri"/>
+                        </a:rPr>
+                        <a:t> · Foro · 1,6%</a:t>
+                      </a:r>
+                    </a:p>
+                  </a:txBody>
+                  <a:tcPr anchor="ctr" marL="109728" marR="91440" marT="36576" marB="36576">
+                    <a:solidFill>
+                      <a:srgbClr val="F2F2F2"/>
+                    </a:solidFill>
+                  </a:tcPr>
+                </a:tc>
+                <a:tc>
+                  <a:txBody>
+                    <a:bodyPr/>
+                    <a:lstStyle/>
+                    <a:p>
+                      <a:pPr algn="l"/>
+                      <a:r>
+                        <a:rPr sz="1100" b="1" i="0">
+                          <a:solidFill>
+                            <a:srgbClr val="2B2B2B"/>
+                          </a:solidFill>
+                          <a:latin typeface="Calibri"/>
+                        </a:rPr>
+                        <a:t>Publica</a:t>
+                      </a:r>
+                      <a:r>
+                        <a:rPr sz="1100" b="0" i="0">
+                          <a:solidFill>
+                            <a:srgbClr val="2B2B2B"/>
+                          </a:solidFill>
+                          <a:latin typeface="Calibri"/>
+                        </a:rPr>
+                        <a:t> tu aporte: valora hechos del trabajo del equipo, nunca a las personas.</a:t>
+                      </a:r>
+                    </a:p>
+                  </a:txBody>
+                  <a:tcPr anchor="ctr" marL="109728" marR="91440" marT="36576" marB="36576">
+                    <a:solidFill>
+                      <a:srgbClr val="F2F2F2"/>
+                    </a:solidFill>
+                  </a:tcPr>
+                </a:tc>
+              </a:tr>
+            </a:tbl>
+          </a:graphicData>
+        </a:graphic>
+      </p:graphicFrame>
+      <p:sp>
+        <p:nvSpPr>
+          <p:cNvPr id="6" name="TextBox 5"/>
+          <p:cNvSpPr txBox="1"/>
+          <p:nvPr/>
+        </p:nvSpPr>
+        <p:spPr>
+          <a:xfrm>
+            <a:off x="640080" y="6080760"/>
+            <a:ext cx="10911535" cy="548640"/>
+          </a:xfrm>
+          <a:prstGeom prst="rect">
+            <a:avLst/>
+          </a:prstGeom>
+          <a:noFill/>
+        </p:spPr>
+        <p:txBody>
+          <a:bodyPr wrap="square" anchor="t" lIns="0" rIns="0" tIns="0" bIns="0">
+            <a:spAutoFit/>
+          </a:bodyPr>
+          <a:lstStyle/>
+          <a:p>
+            <a:r>
+              <a:rPr sz="1200" b="0" i="1">
+                <a:solidFill>
+                  <a:srgbClr val="2B2B2B"/>
+                </a:solidFill>
+                <a:latin typeface="Calibri"/>
+              </a:rPr>
+              <a:t>Esta misma tabla va al final de todas las sesiones. La </a:t>
+            </a:r>
+            <a:r>
+              <a:rPr sz="1200" b="1" i="1">
+                <a:solidFill>
+                  <a:srgbClr val="2B2B2B"/>
+                </a:solidFill>
+                <a:latin typeface="Calibri"/>
+              </a:rPr>
+              <a:t>fecha</a:t>
+            </a:r>
+            <a:r>
+              <a:rPr sz="1200" b="0" i="1">
+                <a:solidFill>
+                  <a:srgbClr val="2B2B2B"/>
+                </a:solidFill>
+                <a:latin typeface="Calibri"/>
+              </a:rPr>
+              <a:t> de cada ventana está en el enunciado del ítem (`Clases/Recursos/ACAs/`) y en el aula: si el aula y cualquier otro material se contradicen, </a:t>
+            </a:r>
+            <a:r>
+              <a:rPr sz="1200" b="1" i="1">
+                <a:solidFill>
+                  <a:srgbClr val="2B2B2B"/>
+                </a:solidFill>
+                <a:latin typeface="Calibri"/>
+              </a:rPr>
+              <a:t>manda el aula</a:t>
+            </a:r>
+            <a:r>
+              <a:rPr sz="1200" b="0" i="1">
+                <a:solidFill>
+                  <a:srgbClr val="2B2B2B"/>
+                </a:solidFill>
+                <a:latin typeface="Calibri"/>
+              </a:rPr>
+              <a:t>.</a:t>
+            </a:r>
+          </a:p>
+        </p:txBody>
+      </p:sp>
+      <p:sp>
+        <p:nvSpPr>
+          <p:cNvPr id="7" name="TextBox 6"/>
+          <p:cNvSpPr txBox="1"/>
+          <p:nvPr/>
+        </p:nvSpPr>
+        <p:spPr>
+          <a:xfrm>
+            <a:off x="11094415" y="6446520"/>
+            <a:ext cx="548640" cy="274320"/>
+          </a:xfrm>
+          <a:prstGeom prst="rect">
+            <a:avLst/>
+          </a:prstGeom>
+          <a:noFill/>
+        </p:spPr>
+        <p:txBody>
+          <a:bodyPr wrap="square" anchor="t" lIns="0" rIns="0" tIns="0" bIns="0">
+            <a:spAutoFit/>
+          </a:bodyPr>
+          <a:lstStyle/>
+          <a:p>
+            <a:pPr algn="r"/>
+            <a:r>
+              <a:rPr sz="1000" b="1" i="0">
+                <a:solidFill>
+                  <a:srgbClr val="8F989D"/>
+                </a:solidFill>
+                <a:latin typeface="Calibri"/>
+              </a:rPr>
+              <a:t>18</a:t>
+            </a:r>
+          </a:p>
+        </p:txBody>
+      </p:sp>
+    </p:spTree>
+  </p:cSld>
+  <p:clrMapOvr>
+    <a:masterClrMapping/>
+  </p:clrMapOvr>
+</p:sld>
+</file>
+
+<file path=ppt/slides/slide19.xml><?xml version="1.0" encoding="utf-8"?>
 <p:sld xmlns:a="http://schemas.openxmlformats.org/drawingml/2006/main" xmlns:p="http://schemas.openxmlformats.org/presentationml/2006/main" xmlns:r="http://schemas.openxmlformats.org/officeDocument/2006/relationships">
   <p:cSld>
     <p:bg>
